--- a/docs/pptx/whole/ritu-linsubhr-ratio-anyhosp_10pct.pptx
+++ b/docs/pptx/whole/ritu-linsubhr-ratio-anyhosp_10pct.pptx
@@ -2443,7 +2443,7 @@
           </p:nvSpPr>
           <p:spPr>
             <a:xfrm>
-              <a:off x="955490" y="2073503"/>
+              <a:off x="957589" y="2073503"/>
               <a:ext cx="0" cy="3649639"/>
             </a:xfrm>
             <a:custGeom>
@@ -2486,7 +2486,7 @@
           </p:nvSpPr>
           <p:spPr>
             <a:xfrm>
-              <a:off x="1892768" y="2073503"/>
+              <a:off x="1893867" y="2073503"/>
               <a:ext cx="0" cy="3649639"/>
             </a:xfrm>
             <a:custGeom>
@@ -2529,7 +2529,7 @@
           </p:nvSpPr>
           <p:spPr>
             <a:xfrm>
-              <a:off x="2830046" y="2073503"/>
+              <a:off x="2830144" y="2073503"/>
               <a:ext cx="0" cy="3649639"/>
             </a:xfrm>
             <a:custGeom>
@@ -2572,7 +2572,7 @@
           </p:nvSpPr>
           <p:spPr>
             <a:xfrm>
-              <a:off x="3767323" y="2073503"/>
+              <a:off x="3766422" y="2073503"/>
               <a:ext cx="0" cy="3649639"/>
             </a:xfrm>
             <a:custGeom>
@@ -2615,7 +2615,7 @@
           </p:nvSpPr>
           <p:spPr>
             <a:xfrm>
-              <a:off x="4704601" y="2073503"/>
+              <a:off x="4702700" y="2073503"/>
               <a:ext cx="0" cy="3649639"/>
             </a:xfrm>
             <a:custGeom>
@@ -2658,7 +2658,7 @@
           </p:nvSpPr>
           <p:spPr>
             <a:xfrm>
-              <a:off x="5641878" y="2073503"/>
+              <a:off x="5638978" y="2073503"/>
               <a:ext cx="0" cy="3649639"/>
             </a:xfrm>
             <a:custGeom>
@@ -2701,7 +2701,7 @@
           </p:nvSpPr>
           <p:spPr>
             <a:xfrm>
-              <a:off x="6579156" y="2073503"/>
+              <a:off x="6575256" y="2073503"/>
               <a:ext cx="0" cy="3649639"/>
             </a:xfrm>
             <a:custGeom>
@@ -2744,7 +2744,7 @@
           </p:nvSpPr>
           <p:spPr>
             <a:xfrm>
-              <a:off x="7516433" y="2073503"/>
+              <a:off x="7511534" y="2073503"/>
               <a:ext cx="0" cy="3649639"/>
             </a:xfrm>
             <a:custGeom>
@@ -2787,7 +2787,7 @@
           </p:nvSpPr>
           <p:spPr>
             <a:xfrm>
-              <a:off x="8453711" y="2073503"/>
+              <a:off x="8447812" y="2073503"/>
               <a:ext cx="0" cy="3649639"/>
             </a:xfrm>
             <a:custGeom>
@@ -3045,7 +3045,7 @@
           </p:nvSpPr>
           <p:spPr>
             <a:xfrm>
-              <a:off x="1424129" y="2073503"/>
+              <a:off x="1425728" y="2073503"/>
               <a:ext cx="0" cy="3649639"/>
             </a:xfrm>
             <a:custGeom>
@@ -3088,7 +3088,7 @@
           </p:nvSpPr>
           <p:spPr>
             <a:xfrm>
-              <a:off x="2361407" y="2073503"/>
+              <a:off x="2362006" y="2073503"/>
               <a:ext cx="0" cy="3649639"/>
             </a:xfrm>
             <a:custGeom>
@@ -3131,7 +3131,7 @@
           </p:nvSpPr>
           <p:spPr>
             <a:xfrm>
-              <a:off x="3298684" y="2073503"/>
+              <a:off x="3298283" y="2073503"/>
               <a:ext cx="0" cy="3649639"/>
             </a:xfrm>
             <a:custGeom>
@@ -3174,7 +3174,7 @@
           </p:nvSpPr>
           <p:spPr>
             <a:xfrm>
-              <a:off x="4235962" y="2073503"/>
+              <a:off x="4234561" y="2073503"/>
               <a:ext cx="0" cy="3649639"/>
             </a:xfrm>
             <a:custGeom>
@@ -3217,7 +3217,7 @@
           </p:nvSpPr>
           <p:spPr>
             <a:xfrm>
-              <a:off x="5173239" y="2073503"/>
+              <a:off x="5170839" y="2073503"/>
               <a:ext cx="0" cy="3649639"/>
             </a:xfrm>
             <a:custGeom>
@@ -3260,7 +3260,7 @@
           </p:nvSpPr>
           <p:spPr>
             <a:xfrm>
-              <a:off x="6110517" y="2073503"/>
+              <a:off x="6107117" y="2073503"/>
               <a:ext cx="0" cy="3649639"/>
             </a:xfrm>
             <a:custGeom>
@@ -3303,7 +3303,7 @@
           </p:nvSpPr>
           <p:spPr>
             <a:xfrm>
-              <a:off x="7047795" y="2073503"/>
+              <a:off x="7043395" y="2073503"/>
               <a:ext cx="0" cy="3649639"/>
             </a:xfrm>
             <a:custGeom>
@@ -3346,7 +3346,7 @@
           </p:nvSpPr>
           <p:spPr>
             <a:xfrm>
-              <a:off x="7985072" y="2073503"/>
+              <a:off x="7979673" y="2073503"/>
               <a:ext cx="0" cy="3649639"/>
             </a:xfrm>
             <a:custGeom>
@@ -3390,599 +3390,596 @@
           <p:spPr>
             <a:xfrm>
               <a:off x="1172049" y="2073503"/>
-              <a:ext cx="7090630" cy="3372903"/>
+              <a:ext cx="7090630" cy="3377510"/>
             </a:xfrm>
             <a:custGeom>
               <a:avLst/>
               <a:pathLst>
-                <a:path w="7090630" h="3372903">
+                <a:path w="7090630" h="3377510">
                   <a:moveTo>
-                    <a:pt x="326171" y="0"/>
+                    <a:pt x="384752" y="0"/>
                   </a:moveTo>
                   <a:lnTo>
-                    <a:pt x="358112" y="56818"/>
-                  </a:lnTo>
-                  <a:lnTo>
-                    <a:pt x="429735" y="179656"/>
-                  </a:lnTo>
-                  <a:lnTo>
-                    <a:pt x="501357" y="298091"/>
-                  </a:lnTo>
-                  <a:lnTo>
-                    <a:pt x="572980" y="412281"/>
-                  </a:lnTo>
-                  <a:lnTo>
-                    <a:pt x="644602" y="522378"/>
-                  </a:lnTo>
-                  <a:lnTo>
-                    <a:pt x="716225" y="628528"/>
-                  </a:lnTo>
-                  <a:lnTo>
-                    <a:pt x="787847" y="730873"/>
-                  </a:lnTo>
-                  <a:lnTo>
-                    <a:pt x="859470" y="829550"/>
-                  </a:lnTo>
-                  <a:lnTo>
-                    <a:pt x="931092" y="924689"/>
-                  </a:lnTo>
-                  <a:lnTo>
-                    <a:pt x="1002715" y="1016419"/>
-                  </a:lnTo>
-                  <a:lnTo>
-                    <a:pt x="1074337" y="1104860"/>
-                  </a:lnTo>
-                  <a:lnTo>
-                    <a:pt x="1145960" y="1190131"/>
-                  </a:lnTo>
-                  <a:lnTo>
-                    <a:pt x="1217582" y="1272346"/>
-                  </a:lnTo>
-                  <a:lnTo>
-                    <a:pt x="1289205" y="1351613"/>
-                  </a:lnTo>
-                  <a:lnTo>
-                    <a:pt x="1360827" y="1428040"/>
-                  </a:lnTo>
-                  <a:lnTo>
-                    <a:pt x="1432450" y="1501726"/>
-                  </a:lnTo>
-                  <a:lnTo>
-                    <a:pt x="1504073" y="1572772"/>
-                  </a:lnTo>
-                  <a:lnTo>
-                    <a:pt x="1575695" y="1641271"/>
-                  </a:lnTo>
-                  <a:lnTo>
-                    <a:pt x="1647318" y="1707314"/>
-                  </a:lnTo>
-                  <a:lnTo>
-                    <a:pt x="1718940" y="1770990"/>
-                  </a:lnTo>
-                  <a:lnTo>
-                    <a:pt x="1790563" y="1832384"/>
-                  </a:lnTo>
-                  <a:lnTo>
-                    <a:pt x="1862185" y="1891577"/>
-                  </a:lnTo>
-                  <a:lnTo>
-                    <a:pt x="1933808" y="1948648"/>
-                  </a:lnTo>
-                  <a:lnTo>
-                    <a:pt x="2005430" y="2003674"/>
-                  </a:lnTo>
-                  <a:lnTo>
-                    <a:pt x="2077053" y="2056727"/>
-                  </a:lnTo>
-                  <a:lnTo>
-                    <a:pt x="2148675" y="2107879"/>
-                  </a:lnTo>
-                  <a:lnTo>
-                    <a:pt x="2220298" y="2157197"/>
-                  </a:lnTo>
-                  <a:lnTo>
-                    <a:pt x="2291920" y="2204747"/>
-                  </a:lnTo>
-                  <a:lnTo>
-                    <a:pt x="2363543" y="2250592"/>
-                  </a:lnTo>
-                  <a:lnTo>
-                    <a:pt x="2435165" y="2294795"/>
-                  </a:lnTo>
-                  <a:lnTo>
-                    <a:pt x="2506788" y="2337413"/>
-                  </a:lnTo>
-                  <a:lnTo>
-                    <a:pt x="2578410" y="2378503"/>
-                  </a:lnTo>
-                  <a:lnTo>
-                    <a:pt x="2650033" y="2418120"/>
-                  </a:lnTo>
-                  <a:lnTo>
-                    <a:pt x="2721655" y="2456318"/>
-                  </a:lnTo>
-                  <a:lnTo>
-                    <a:pt x="2793278" y="2493146"/>
-                  </a:lnTo>
-                  <a:lnTo>
-                    <a:pt x="2864901" y="2528654"/>
-                  </a:lnTo>
-                  <a:lnTo>
-                    <a:pt x="2936523" y="2562889"/>
-                  </a:lnTo>
-                  <a:lnTo>
-                    <a:pt x="3008146" y="2595897"/>
-                  </a:lnTo>
-                  <a:lnTo>
-                    <a:pt x="3079768" y="2627722"/>
-                  </a:lnTo>
-                  <a:lnTo>
-                    <a:pt x="3151391" y="2654715"/>
-                  </a:lnTo>
-                  <a:lnTo>
-                    <a:pt x="3223013" y="2657874"/>
-                  </a:lnTo>
-                  <a:lnTo>
-                    <a:pt x="3294636" y="2661020"/>
-                  </a:lnTo>
-                  <a:lnTo>
-                    <a:pt x="3366258" y="2664155"/>
-                  </a:lnTo>
-                  <a:lnTo>
-                    <a:pt x="3437881" y="2667277"/>
-                  </a:lnTo>
-                  <a:lnTo>
-                    <a:pt x="3509503" y="2670388"/>
-                  </a:lnTo>
-                  <a:lnTo>
-                    <a:pt x="3581126" y="2673487"/>
-                  </a:lnTo>
-                  <a:lnTo>
-                    <a:pt x="3652748" y="2676574"/>
-                  </a:lnTo>
-                  <a:lnTo>
-                    <a:pt x="3724371" y="2679649"/>
-                  </a:lnTo>
-                  <a:lnTo>
-                    <a:pt x="3795993" y="2682713"/>
-                  </a:lnTo>
-                  <a:lnTo>
-                    <a:pt x="3867616" y="2685765"/>
-                  </a:lnTo>
-                  <a:lnTo>
-                    <a:pt x="3939238" y="2688805"/>
-                  </a:lnTo>
-                  <a:lnTo>
-                    <a:pt x="4010861" y="2691834"/>
-                  </a:lnTo>
-                  <a:lnTo>
-                    <a:pt x="4082483" y="2694851"/>
-                  </a:lnTo>
-                  <a:lnTo>
-                    <a:pt x="4154106" y="2697857"/>
-                  </a:lnTo>
-                  <a:lnTo>
-                    <a:pt x="4225729" y="2700851"/>
-                  </a:lnTo>
-                  <a:lnTo>
-                    <a:pt x="4297351" y="2703834"/>
-                  </a:lnTo>
-                  <a:lnTo>
-                    <a:pt x="4368974" y="2706805"/>
-                  </a:lnTo>
-                  <a:lnTo>
-                    <a:pt x="4440596" y="2709765"/>
-                  </a:lnTo>
-                  <a:lnTo>
-                    <a:pt x="4512219" y="2712714"/>
-                  </a:lnTo>
-                  <a:lnTo>
-                    <a:pt x="4583841" y="2715652"/>
-                  </a:lnTo>
-                  <a:lnTo>
-                    <a:pt x="4655464" y="2718578"/>
-                  </a:lnTo>
-                  <a:lnTo>
-                    <a:pt x="4727086" y="2721493"/>
-                  </a:lnTo>
-                  <a:lnTo>
-                    <a:pt x="4798709" y="2724398"/>
-                  </a:lnTo>
-                  <a:lnTo>
-                    <a:pt x="4870331" y="2727291"/>
-                  </a:lnTo>
-                  <a:lnTo>
-                    <a:pt x="4941954" y="2730173"/>
-                  </a:lnTo>
-                  <a:lnTo>
-                    <a:pt x="5013576" y="2733044"/>
-                  </a:lnTo>
-                  <a:lnTo>
-                    <a:pt x="5085199" y="2735904"/>
-                  </a:lnTo>
-                  <a:lnTo>
-                    <a:pt x="5156821" y="2738753"/>
-                  </a:lnTo>
-                  <a:lnTo>
-                    <a:pt x="5228444" y="2741592"/>
-                  </a:lnTo>
-                  <a:lnTo>
-                    <a:pt x="5300066" y="2744419"/>
-                  </a:lnTo>
-                  <a:lnTo>
-                    <a:pt x="5371689" y="2747236"/>
-                  </a:lnTo>
-                  <a:lnTo>
-                    <a:pt x="5443311" y="2750042"/>
-                  </a:lnTo>
-                  <a:lnTo>
-                    <a:pt x="5514934" y="2752838"/>
-                  </a:lnTo>
-                  <a:lnTo>
-                    <a:pt x="5586557" y="2755622"/>
-                  </a:lnTo>
-                  <a:lnTo>
-                    <a:pt x="5658179" y="2758396"/>
-                  </a:lnTo>
-                  <a:lnTo>
-                    <a:pt x="5729802" y="2761160"/>
-                  </a:lnTo>
-                  <a:lnTo>
-                    <a:pt x="5801424" y="2763913"/>
-                  </a:lnTo>
-                  <a:lnTo>
-                    <a:pt x="5873047" y="2766656"/>
-                  </a:lnTo>
-                  <a:lnTo>
-                    <a:pt x="5944669" y="2769388"/>
-                  </a:lnTo>
-                  <a:lnTo>
-                    <a:pt x="6016292" y="2772109"/>
-                  </a:lnTo>
-                  <a:lnTo>
-                    <a:pt x="6087914" y="2774821"/>
-                  </a:lnTo>
-                  <a:lnTo>
-                    <a:pt x="6159537" y="2777522"/>
-                  </a:lnTo>
-                  <a:lnTo>
-                    <a:pt x="6231159" y="2780212"/>
-                  </a:lnTo>
-                  <a:lnTo>
-                    <a:pt x="6302782" y="2782893"/>
-                  </a:lnTo>
-                  <a:lnTo>
-                    <a:pt x="6374404" y="2785563"/>
-                  </a:lnTo>
-                  <a:lnTo>
-                    <a:pt x="6446027" y="2788223"/>
-                  </a:lnTo>
-                  <a:lnTo>
-                    <a:pt x="6517649" y="2790873"/>
-                  </a:lnTo>
-                  <a:lnTo>
-                    <a:pt x="6589272" y="2793513"/>
-                  </a:lnTo>
-                  <a:lnTo>
-                    <a:pt x="6660894" y="2796143"/>
-                  </a:lnTo>
-                  <a:lnTo>
-                    <a:pt x="6732517" y="2798762"/>
-                  </a:lnTo>
-                  <a:lnTo>
-                    <a:pt x="6804139" y="2801372"/>
-                  </a:lnTo>
-                  <a:lnTo>
-                    <a:pt x="6875762" y="2803972"/>
-                  </a:lnTo>
-                  <a:lnTo>
-                    <a:pt x="6947385" y="2806562"/>
-                  </a:lnTo>
-                  <a:lnTo>
-                    <a:pt x="7019007" y="2809142"/>
-                  </a:lnTo>
-                  <a:lnTo>
-                    <a:pt x="7090630" y="2811712"/>
-                  </a:lnTo>
-                  <a:lnTo>
-                    <a:pt x="7090630" y="3372903"/>
-                  </a:lnTo>
-                  <a:lnTo>
-                    <a:pt x="7019007" y="3368782"/>
-                  </a:lnTo>
-                  <a:lnTo>
-                    <a:pt x="6947385" y="3364508"/>
-                  </a:lnTo>
-                  <a:lnTo>
-                    <a:pt x="6875762" y="3360075"/>
-                  </a:lnTo>
-                  <a:lnTo>
-                    <a:pt x="6804139" y="3355477"/>
-                  </a:lnTo>
-                  <a:lnTo>
-                    <a:pt x="6732517" y="3350708"/>
-                  </a:lnTo>
-                  <a:lnTo>
-                    <a:pt x="6660894" y="3345762"/>
-                  </a:lnTo>
-                  <a:lnTo>
-                    <a:pt x="6589272" y="3340632"/>
-                  </a:lnTo>
-                  <a:lnTo>
-                    <a:pt x="6517649" y="3335312"/>
-                  </a:lnTo>
-                  <a:lnTo>
-                    <a:pt x="6446027" y="3329793"/>
-                  </a:lnTo>
-                  <a:lnTo>
-                    <a:pt x="6374404" y="3324070"/>
-                  </a:lnTo>
-                  <a:lnTo>
-                    <a:pt x="6302782" y="3318133"/>
-                  </a:lnTo>
-                  <a:lnTo>
-                    <a:pt x="6231159" y="3311976"/>
-                  </a:lnTo>
-                  <a:lnTo>
-                    <a:pt x="6159537" y="3305590"/>
-                  </a:lnTo>
-                  <a:lnTo>
-                    <a:pt x="6087914" y="3298967"/>
-                  </a:lnTo>
-                  <a:lnTo>
-                    <a:pt x="6016292" y="3292097"/>
-                  </a:lnTo>
-                  <a:lnTo>
-                    <a:pt x="5944669" y="3284972"/>
-                  </a:lnTo>
-                  <a:lnTo>
-                    <a:pt x="5873047" y="3277582"/>
-                  </a:lnTo>
-                  <a:lnTo>
-                    <a:pt x="5801424" y="3269917"/>
-                  </a:lnTo>
-                  <a:lnTo>
-                    <a:pt x="5729802" y="3261968"/>
-                  </a:lnTo>
-                  <a:lnTo>
-                    <a:pt x="5658179" y="3253722"/>
-                  </a:lnTo>
-                  <a:lnTo>
-                    <a:pt x="5586557" y="3245171"/>
-                  </a:lnTo>
-                  <a:lnTo>
-                    <a:pt x="5514934" y="3236301"/>
-                  </a:lnTo>
-                  <a:lnTo>
-                    <a:pt x="5443311" y="3227102"/>
-                  </a:lnTo>
-                  <a:lnTo>
-                    <a:pt x="5371689" y="3217560"/>
-                  </a:lnTo>
-                  <a:lnTo>
-                    <a:pt x="5300066" y="3207664"/>
-                  </a:lnTo>
-                  <a:lnTo>
-                    <a:pt x="5228444" y="3197400"/>
-                  </a:lnTo>
-                  <a:lnTo>
-                    <a:pt x="5156821" y="3186754"/>
-                  </a:lnTo>
-                  <a:lnTo>
-                    <a:pt x="5085199" y="3175713"/>
-                  </a:lnTo>
-                  <a:lnTo>
-                    <a:pt x="5013576" y="3164261"/>
-                  </a:lnTo>
-                  <a:lnTo>
-                    <a:pt x="4941954" y="3152383"/>
-                  </a:lnTo>
-                  <a:lnTo>
-                    <a:pt x="4870331" y="3140064"/>
-                  </a:lnTo>
-                  <a:lnTo>
-                    <a:pt x="4798709" y="3127286"/>
-                  </a:lnTo>
-                  <a:lnTo>
-                    <a:pt x="4727086" y="3114034"/>
-                  </a:lnTo>
-                  <a:lnTo>
-                    <a:pt x="4655464" y="3100289"/>
-                  </a:lnTo>
-                  <a:lnTo>
-                    <a:pt x="4583841" y="3086033"/>
-                  </a:lnTo>
-                  <a:lnTo>
-                    <a:pt x="4512219" y="3071247"/>
-                  </a:lnTo>
-                  <a:lnTo>
-                    <a:pt x="4440596" y="3055911"/>
-                  </a:lnTo>
-                  <a:lnTo>
-                    <a:pt x="4368974" y="3040005"/>
-                  </a:lnTo>
-                  <a:lnTo>
-                    <a:pt x="4297351" y="3023508"/>
-                  </a:lnTo>
-                  <a:lnTo>
-                    <a:pt x="4225729" y="3006398"/>
-                  </a:lnTo>
-                  <a:lnTo>
-                    <a:pt x="4154106" y="2988651"/>
-                  </a:lnTo>
-                  <a:lnTo>
-                    <a:pt x="4082483" y="2970244"/>
-                  </a:lnTo>
-                  <a:lnTo>
-                    <a:pt x="4010861" y="2951154"/>
-                  </a:lnTo>
-                  <a:lnTo>
-                    <a:pt x="3939238" y="2931353"/>
-                  </a:lnTo>
-                  <a:lnTo>
-                    <a:pt x="3867616" y="2910816"/>
-                  </a:lnTo>
-                  <a:lnTo>
-                    <a:pt x="3795993" y="2889516"/>
-                  </a:lnTo>
-                  <a:lnTo>
-                    <a:pt x="3724371" y="2867424"/>
-                  </a:lnTo>
-                  <a:lnTo>
-                    <a:pt x="3652748" y="2844511"/>
-                  </a:lnTo>
-                  <a:lnTo>
-                    <a:pt x="3581126" y="2820746"/>
-                  </a:lnTo>
-                  <a:lnTo>
-                    <a:pt x="3509503" y="2796097"/>
-                  </a:lnTo>
-                  <a:lnTo>
-                    <a:pt x="3437881" y="2770532"/>
-                  </a:lnTo>
-                  <a:lnTo>
-                    <a:pt x="3366258" y="2744016"/>
-                  </a:lnTo>
-                  <a:lnTo>
-                    <a:pt x="3294636" y="2716515"/>
-                  </a:lnTo>
-                  <a:lnTo>
-                    <a:pt x="3223013" y="2687991"/>
-                  </a:lnTo>
-                  <a:lnTo>
-                    <a:pt x="3151391" y="2658406"/>
-                  </a:lnTo>
-                  <a:lnTo>
-                    <a:pt x="3079768" y="2651544"/>
-                  </a:lnTo>
-                  <a:lnTo>
-                    <a:pt x="3008146" y="2648362"/>
-                  </a:lnTo>
-                  <a:lnTo>
-                    <a:pt x="2936523" y="2645167"/>
-                  </a:lnTo>
-                  <a:lnTo>
-                    <a:pt x="2864901" y="2641959"/>
-                  </a:lnTo>
-                  <a:lnTo>
-                    <a:pt x="2793278" y="2638740"/>
-                  </a:lnTo>
-                  <a:lnTo>
-                    <a:pt x="2721655" y="2635508"/>
-                  </a:lnTo>
-                  <a:lnTo>
-                    <a:pt x="2650033" y="2632264"/>
-                  </a:lnTo>
-                  <a:lnTo>
-                    <a:pt x="2578410" y="2629008"/>
-                  </a:lnTo>
-                  <a:lnTo>
-                    <a:pt x="2506788" y="2625739"/>
-                  </a:lnTo>
-                  <a:lnTo>
-                    <a:pt x="2435165" y="2622457"/>
-                  </a:lnTo>
-                  <a:lnTo>
-                    <a:pt x="2363543" y="2619163"/>
-                  </a:lnTo>
-                  <a:lnTo>
-                    <a:pt x="2291920" y="2615856"/>
-                  </a:lnTo>
-                  <a:lnTo>
-                    <a:pt x="2220298" y="2612537"/>
-                  </a:lnTo>
-                  <a:lnTo>
-                    <a:pt x="2148675" y="2609205"/>
-                  </a:lnTo>
-                  <a:lnTo>
-                    <a:pt x="2077053" y="2605860"/>
-                  </a:lnTo>
-                  <a:lnTo>
-                    <a:pt x="2005430" y="2602503"/>
-                  </a:lnTo>
-                  <a:lnTo>
-                    <a:pt x="1933808" y="2599133"/>
-                  </a:lnTo>
-                  <a:lnTo>
-                    <a:pt x="1862185" y="2595749"/>
-                  </a:lnTo>
-                  <a:lnTo>
-                    <a:pt x="1790563" y="2592353"/>
-                  </a:lnTo>
-                  <a:lnTo>
-                    <a:pt x="1718940" y="2588944"/>
-                  </a:lnTo>
-                  <a:lnTo>
-                    <a:pt x="1647318" y="2585522"/>
-                  </a:lnTo>
-                  <a:lnTo>
-                    <a:pt x="1575695" y="2582086"/>
-                  </a:lnTo>
-                  <a:lnTo>
-                    <a:pt x="1504073" y="2578638"/>
-                  </a:lnTo>
-                  <a:lnTo>
-                    <a:pt x="1432450" y="2575176"/>
-                  </a:lnTo>
-                  <a:lnTo>
-                    <a:pt x="1360827" y="2571702"/>
-                  </a:lnTo>
-                  <a:lnTo>
-                    <a:pt x="1289205" y="2568213"/>
-                  </a:lnTo>
-                  <a:lnTo>
-                    <a:pt x="1217582" y="2564712"/>
-                  </a:lnTo>
-                  <a:lnTo>
-                    <a:pt x="1145960" y="2561197"/>
-                  </a:lnTo>
-                  <a:lnTo>
-                    <a:pt x="1074337" y="2557669"/>
-                  </a:lnTo>
-                  <a:lnTo>
-                    <a:pt x="1002715" y="2554127"/>
-                  </a:lnTo>
-                  <a:lnTo>
-                    <a:pt x="931092" y="2550571"/>
-                  </a:lnTo>
-                  <a:lnTo>
-                    <a:pt x="859470" y="2547003"/>
-                  </a:lnTo>
-                  <a:lnTo>
-                    <a:pt x="787847" y="2543420"/>
-                  </a:lnTo>
-                  <a:lnTo>
-                    <a:pt x="716225" y="2539824"/>
-                  </a:lnTo>
-                  <a:lnTo>
-                    <a:pt x="644602" y="2536214"/>
-                  </a:lnTo>
-                  <a:lnTo>
-                    <a:pt x="572980" y="2532590"/>
-                  </a:lnTo>
-                  <a:lnTo>
-                    <a:pt x="501357" y="2528952"/>
-                  </a:lnTo>
-                  <a:lnTo>
-                    <a:pt x="429735" y="2525300"/>
-                  </a:lnTo>
-                  <a:lnTo>
-                    <a:pt x="358112" y="2521635"/>
-                  </a:lnTo>
-                  <a:lnTo>
-                    <a:pt x="286490" y="2517955"/>
-                  </a:lnTo>
-                  <a:lnTo>
-                    <a:pt x="214867" y="2514261"/>
-                  </a:lnTo>
-                  <a:lnTo>
-                    <a:pt x="143245" y="2510553"/>
-                  </a:lnTo>
-                  <a:lnTo>
-                    <a:pt x="71622" y="2506831"/>
-                  </a:lnTo>
-                  <a:lnTo>
-                    <a:pt x="0" y="2503095"/>
+                    <a:pt x="429735" y="81161"/>
+                  </a:lnTo>
+                  <a:lnTo>
+                    <a:pt x="501357" y="205659"/>
+                  </a:lnTo>
+                  <a:lnTo>
+                    <a:pt x="572980" y="325602"/>
+                  </a:lnTo>
+                  <a:lnTo>
+                    <a:pt x="644602" y="441157"/>
+                  </a:lnTo>
+                  <a:lnTo>
+                    <a:pt x="716225" y="552483"/>
+                  </a:lnTo>
+                  <a:lnTo>
+                    <a:pt x="787847" y="659736"/>
+                  </a:lnTo>
+                  <a:lnTo>
+                    <a:pt x="859470" y="763065"/>
+                  </a:lnTo>
+                  <a:lnTo>
+                    <a:pt x="931092" y="862612"/>
+                  </a:lnTo>
+                  <a:lnTo>
+                    <a:pt x="1002715" y="958518"/>
+                  </a:lnTo>
+                  <a:lnTo>
+                    <a:pt x="1074337" y="1050914"/>
+                  </a:lnTo>
+                  <a:lnTo>
+                    <a:pt x="1145960" y="1139930"/>
+                  </a:lnTo>
+                  <a:lnTo>
+                    <a:pt x="1217582" y="1225689"/>
+                  </a:lnTo>
+                  <a:lnTo>
+                    <a:pt x="1289205" y="1308310"/>
+                  </a:lnTo>
+                  <a:lnTo>
+                    <a:pt x="1360827" y="1387907"/>
+                  </a:lnTo>
+                  <a:lnTo>
+                    <a:pt x="1432450" y="1464593"/>
+                  </a:lnTo>
+                  <a:lnTo>
+                    <a:pt x="1504073" y="1538472"/>
+                  </a:lnTo>
+                  <a:lnTo>
+                    <a:pt x="1575695" y="1609648"/>
+                  </a:lnTo>
+                  <a:lnTo>
+                    <a:pt x="1647318" y="1678220"/>
+                  </a:lnTo>
+                  <a:lnTo>
+                    <a:pt x="1718940" y="1744283"/>
+                  </a:lnTo>
+                  <a:lnTo>
+                    <a:pt x="1790563" y="1807929"/>
+                  </a:lnTo>
+                  <a:lnTo>
+                    <a:pt x="1862185" y="1869246"/>
+                  </a:lnTo>
+                  <a:lnTo>
+                    <a:pt x="1933808" y="1928320"/>
+                  </a:lnTo>
+                  <a:lnTo>
+                    <a:pt x="2005430" y="1985232"/>
+                  </a:lnTo>
+                  <a:lnTo>
+                    <a:pt x="2077053" y="2040061"/>
+                  </a:lnTo>
+                  <a:lnTo>
+                    <a:pt x="2148675" y="2092885"/>
+                  </a:lnTo>
+                  <a:lnTo>
+                    <a:pt x="2220298" y="2143776"/>
+                  </a:lnTo>
+                  <a:lnTo>
+                    <a:pt x="2291920" y="2192804"/>
+                  </a:lnTo>
+                  <a:lnTo>
+                    <a:pt x="2363543" y="2240039"/>
+                  </a:lnTo>
+                  <a:lnTo>
+                    <a:pt x="2435165" y="2285545"/>
+                  </a:lnTo>
+                  <a:lnTo>
+                    <a:pt x="2506788" y="2329387"/>
+                  </a:lnTo>
+                  <a:lnTo>
+                    <a:pt x="2578410" y="2371624"/>
+                  </a:lnTo>
+                  <a:lnTo>
+                    <a:pt x="2650033" y="2412316"/>
+                  </a:lnTo>
+                  <a:lnTo>
+                    <a:pt x="2721655" y="2451519"/>
+                  </a:lnTo>
+                  <a:lnTo>
+                    <a:pt x="2793278" y="2489287"/>
+                  </a:lnTo>
+                  <a:lnTo>
+                    <a:pt x="2864901" y="2525674"/>
+                  </a:lnTo>
+                  <a:lnTo>
+                    <a:pt x="2936523" y="2560729"/>
+                  </a:lnTo>
+                  <a:lnTo>
+                    <a:pt x="3008146" y="2594502"/>
+                  </a:lnTo>
+                  <a:lnTo>
+                    <a:pt x="3079768" y="2627038"/>
+                  </a:lnTo>
+                  <a:lnTo>
+                    <a:pt x="3151391" y="2654795"/>
+                  </a:lnTo>
+                  <a:lnTo>
+                    <a:pt x="3223013" y="2658634"/>
+                  </a:lnTo>
+                  <a:lnTo>
+                    <a:pt x="3294636" y="2662456"/>
+                  </a:lnTo>
+                  <a:lnTo>
+                    <a:pt x="3366258" y="2666260"/>
+                  </a:lnTo>
+                  <a:lnTo>
+                    <a:pt x="3437881" y="2670047"/>
+                  </a:lnTo>
+                  <a:lnTo>
+                    <a:pt x="3509503" y="2673816"/>
+                  </a:lnTo>
+                  <a:lnTo>
+                    <a:pt x="3581126" y="2677567"/>
+                  </a:lnTo>
+                  <a:lnTo>
+                    <a:pt x="3652748" y="2681301"/>
+                  </a:lnTo>
+                  <a:lnTo>
+                    <a:pt x="3724371" y="2685018"/>
+                  </a:lnTo>
+                  <a:lnTo>
+                    <a:pt x="3795993" y="2688718"/>
+                  </a:lnTo>
+                  <a:lnTo>
+                    <a:pt x="3867616" y="2692400"/>
+                  </a:lnTo>
+                  <a:lnTo>
+                    <a:pt x="3939238" y="2696066"/>
+                  </a:lnTo>
+                  <a:lnTo>
+                    <a:pt x="4010861" y="2699714"/>
+                  </a:lnTo>
+                  <a:lnTo>
+                    <a:pt x="4082483" y="2703346"/>
+                  </a:lnTo>
+                  <a:lnTo>
+                    <a:pt x="4154106" y="2706960"/>
+                  </a:lnTo>
+                  <a:lnTo>
+                    <a:pt x="4225729" y="2710558"/>
+                  </a:lnTo>
+                  <a:lnTo>
+                    <a:pt x="4297351" y="2714140"/>
+                  </a:lnTo>
+                  <a:lnTo>
+                    <a:pt x="4368974" y="2717704"/>
+                  </a:lnTo>
+                  <a:lnTo>
+                    <a:pt x="4440596" y="2721252"/>
+                  </a:lnTo>
+                  <a:lnTo>
+                    <a:pt x="4512219" y="2724784"/>
+                  </a:lnTo>
+                  <a:lnTo>
+                    <a:pt x="4583841" y="2728300"/>
+                  </a:lnTo>
+                  <a:lnTo>
+                    <a:pt x="4655464" y="2731799"/>
+                  </a:lnTo>
+                  <a:lnTo>
+                    <a:pt x="4727086" y="2735282"/>
+                  </a:lnTo>
+                  <a:lnTo>
+                    <a:pt x="4798709" y="2738748"/>
+                  </a:lnTo>
+                  <a:lnTo>
+                    <a:pt x="4870331" y="2742199"/>
+                  </a:lnTo>
+                  <a:lnTo>
+                    <a:pt x="4941954" y="2745634"/>
+                  </a:lnTo>
+                  <a:lnTo>
+                    <a:pt x="5013576" y="2749053"/>
+                  </a:lnTo>
+                  <a:lnTo>
+                    <a:pt x="5085199" y="2752456"/>
+                  </a:lnTo>
+                  <a:lnTo>
+                    <a:pt x="5156821" y="2755843"/>
+                  </a:lnTo>
+                  <a:lnTo>
+                    <a:pt x="5228444" y="2759214"/>
+                  </a:lnTo>
+                  <a:lnTo>
+                    <a:pt x="5300066" y="2762570"/>
+                  </a:lnTo>
+                  <a:lnTo>
+                    <a:pt x="5371689" y="2765911"/>
+                  </a:lnTo>
+                  <a:lnTo>
+                    <a:pt x="5443311" y="2769236"/>
+                  </a:lnTo>
+                  <a:lnTo>
+                    <a:pt x="5514934" y="2772545"/>
+                  </a:lnTo>
+                  <a:lnTo>
+                    <a:pt x="5586557" y="2775839"/>
+                  </a:lnTo>
+                  <a:lnTo>
+                    <a:pt x="5658179" y="2779118"/>
+                  </a:lnTo>
+                  <a:lnTo>
+                    <a:pt x="5729802" y="2782382"/>
+                  </a:lnTo>
+                  <a:lnTo>
+                    <a:pt x="5801424" y="2785631"/>
+                  </a:lnTo>
+                  <a:lnTo>
+                    <a:pt x="5873047" y="2788864"/>
+                  </a:lnTo>
+                  <a:lnTo>
+                    <a:pt x="5944669" y="2792083"/>
+                  </a:lnTo>
+                  <a:lnTo>
+                    <a:pt x="6016292" y="2795287"/>
+                  </a:lnTo>
+                  <a:lnTo>
+                    <a:pt x="6087914" y="2798475"/>
+                  </a:lnTo>
+                  <a:lnTo>
+                    <a:pt x="6159537" y="2801649"/>
+                  </a:lnTo>
+                  <a:lnTo>
+                    <a:pt x="6231159" y="2804809"/>
+                  </a:lnTo>
+                  <a:lnTo>
+                    <a:pt x="6302782" y="2807954"/>
+                  </a:lnTo>
+                  <a:lnTo>
+                    <a:pt x="6374404" y="2811084"/>
+                  </a:lnTo>
+                  <a:lnTo>
+                    <a:pt x="6446027" y="2814199"/>
+                  </a:lnTo>
+                  <a:lnTo>
+                    <a:pt x="6517649" y="2817301"/>
+                  </a:lnTo>
+                  <a:lnTo>
+                    <a:pt x="6589272" y="2820388"/>
+                  </a:lnTo>
+                  <a:lnTo>
+                    <a:pt x="6660894" y="2823460"/>
+                  </a:lnTo>
+                  <a:lnTo>
+                    <a:pt x="6732517" y="2826518"/>
+                  </a:lnTo>
+                  <a:lnTo>
+                    <a:pt x="6804139" y="2829563"/>
+                  </a:lnTo>
+                  <a:lnTo>
+                    <a:pt x="6875762" y="2832593"/>
+                  </a:lnTo>
+                  <a:lnTo>
+                    <a:pt x="6947385" y="2835609"/>
+                  </a:lnTo>
+                  <a:lnTo>
+                    <a:pt x="7019007" y="2838611"/>
+                  </a:lnTo>
+                  <a:lnTo>
+                    <a:pt x="7090630" y="2841599"/>
+                  </a:lnTo>
+                  <a:lnTo>
+                    <a:pt x="7090630" y="3377510"/>
+                  </a:lnTo>
+                  <a:lnTo>
+                    <a:pt x="7019007" y="3373475"/>
+                  </a:lnTo>
+                  <a:lnTo>
+                    <a:pt x="6947385" y="3369287"/>
+                  </a:lnTo>
+                  <a:lnTo>
+                    <a:pt x="6875762" y="3364940"/>
+                  </a:lnTo>
+                  <a:lnTo>
+                    <a:pt x="6804139" y="3360428"/>
+                  </a:lnTo>
+                  <a:lnTo>
+                    <a:pt x="6732517" y="3355744"/>
+                  </a:lnTo>
+                  <a:lnTo>
+                    <a:pt x="6660894" y="3350883"/>
+                  </a:lnTo>
+                  <a:lnTo>
+                    <a:pt x="6589272" y="3345837"/>
+                  </a:lnTo>
+                  <a:lnTo>
+                    <a:pt x="6517649" y="3340599"/>
+                  </a:lnTo>
+                  <a:lnTo>
+                    <a:pt x="6446027" y="3335163"/>
+                  </a:lnTo>
+                  <a:lnTo>
+                    <a:pt x="6374404" y="3329520"/>
+                  </a:lnTo>
+                  <a:lnTo>
+                    <a:pt x="6302782" y="3323662"/>
+                  </a:lnTo>
+                  <a:lnTo>
+                    <a:pt x="6231159" y="3317582"/>
+                  </a:lnTo>
+                  <a:lnTo>
+                    <a:pt x="6159537" y="3311272"/>
+                  </a:lnTo>
+                  <a:lnTo>
+                    <a:pt x="6087914" y="3304721"/>
+                  </a:lnTo>
+                  <a:lnTo>
+                    <a:pt x="6016292" y="3297922"/>
+                  </a:lnTo>
+                  <a:lnTo>
+                    <a:pt x="5944669" y="3290865"/>
+                  </a:lnTo>
+                  <a:lnTo>
+                    <a:pt x="5873047" y="3283539"/>
+                  </a:lnTo>
+                  <a:lnTo>
+                    <a:pt x="5801424" y="3275936"/>
+                  </a:lnTo>
+                  <a:lnTo>
+                    <a:pt x="5729802" y="3268043"/>
+                  </a:lnTo>
+                  <a:lnTo>
+                    <a:pt x="5658179" y="3259851"/>
+                  </a:lnTo>
+                  <a:lnTo>
+                    <a:pt x="5586557" y="3251348"/>
+                  </a:lnTo>
+                  <a:lnTo>
+                    <a:pt x="5514934" y="3242521"/>
+                  </a:lnTo>
+                  <a:lnTo>
+                    <a:pt x="5443311" y="3233360"/>
+                  </a:lnTo>
+                  <a:lnTo>
+                    <a:pt x="5371689" y="3223851"/>
+                  </a:lnTo>
+                  <a:lnTo>
+                    <a:pt x="5300066" y="3213980"/>
+                  </a:lnTo>
+                  <a:lnTo>
+                    <a:pt x="5228444" y="3203735"/>
+                  </a:lnTo>
+                  <a:lnTo>
+                    <a:pt x="5156821" y="3193100"/>
+                  </a:lnTo>
+                  <a:lnTo>
+                    <a:pt x="5085199" y="3182062"/>
+                  </a:lnTo>
+                  <a:lnTo>
+                    <a:pt x="5013576" y="3170604"/>
+                  </a:lnTo>
+                  <a:lnTo>
+                    <a:pt x="4941954" y="3158711"/>
+                  </a:lnTo>
+                  <a:lnTo>
+                    <a:pt x="4870331" y="3146367"/>
+                  </a:lnTo>
+                  <a:lnTo>
+                    <a:pt x="4798709" y="3133553"/>
+                  </a:lnTo>
+                  <a:lnTo>
+                    <a:pt x="4727086" y="3120253"/>
+                  </a:lnTo>
+                  <a:lnTo>
+                    <a:pt x="4655464" y="3106448"/>
+                  </a:lnTo>
+                  <a:lnTo>
+                    <a:pt x="4583841" y="3092119"/>
+                  </a:lnTo>
+                  <a:lnTo>
+                    <a:pt x="4512219" y="3077245"/>
+                  </a:lnTo>
+                  <a:lnTo>
+                    <a:pt x="4440596" y="3061807"/>
+                  </a:lnTo>
+                  <a:lnTo>
+                    <a:pt x="4368974" y="3045782"/>
+                  </a:lnTo>
+                  <a:lnTo>
+                    <a:pt x="4297351" y="3029148"/>
+                  </a:lnTo>
+                  <a:lnTo>
+                    <a:pt x="4225729" y="3011883"/>
+                  </a:lnTo>
+                  <a:lnTo>
+                    <a:pt x="4154106" y="2993962"/>
+                  </a:lnTo>
+                  <a:lnTo>
+                    <a:pt x="4082483" y="2975361"/>
+                  </a:lnTo>
+                  <a:lnTo>
+                    <a:pt x="4010861" y="2956053"/>
+                  </a:lnTo>
+                  <a:lnTo>
+                    <a:pt x="3939238" y="2936012"/>
+                  </a:lnTo>
+                  <a:lnTo>
+                    <a:pt x="3867616" y="2915209"/>
+                  </a:lnTo>
+                  <a:lnTo>
+                    <a:pt x="3795993" y="2893617"/>
+                  </a:lnTo>
+                  <a:lnTo>
+                    <a:pt x="3724371" y="2871204"/>
+                  </a:lnTo>
+                  <a:lnTo>
+                    <a:pt x="3652748" y="2847941"/>
+                  </a:lnTo>
+                  <a:lnTo>
+                    <a:pt x="3581126" y="2823793"/>
+                  </a:lnTo>
+                  <a:lnTo>
+                    <a:pt x="3509503" y="2798729"/>
+                  </a:lnTo>
+                  <a:lnTo>
+                    <a:pt x="3437881" y="2772713"/>
+                  </a:lnTo>
+                  <a:lnTo>
+                    <a:pt x="3366258" y="2745709"/>
+                  </a:lnTo>
+                  <a:lnTo>
+                    <a:pt x="3294636" y="2717679"/>
+                  </a:lnTo>
+                  <a:lnTo>
+                    <a:pt x="3223013" y="2688584"/>
+                  </a:lnTo>
+                  <a:lnTo>
+                    <a:pt x="3151391" y="2658385"/>
+                  </a:lnTo>
+                  <a:lnTo>
+                    <a:pt x="3079768" y="2650937"/>
+                  </a:lnTo>
+                  <a:lnTo>
+                    <a:pt x="3008146" y="2647062"/>
+                  </a:lnTo>
+                  <a:lnTo>
+                    <a:pt x="2936523" y="2643169"/>
+                  </a:lnTo>
+                  <a:lnTo>
+                    <a:pt x="2864901" y="2639257"/>
+                  </a:lnTo>
+                  <a:lnTo>
+                    <a:pt x="2793278" y="2635327"/>
+                  </a:lnTo>
+                  <a:lnTo>
+                    <a:pt x="2721655" y="2631379"/>
+                  </a:lnTo>
+                  <a:lnTo>
+                    <a:pt x="2650033" y="2627413"/>
+                  </a:lnTo>
+                  <a:lnTo>
+                    <a:pt x="2578410" y="2623428"/>
+                  </a:lnTo>
+                  <a:lnTo>
+                    <a:pt x="2506788" y="2619425"/>
+                  </a:lnTo>
+                  <a:lnTo>
+                    <a:pt x="2435165" y="2615402"/>
+                  </a:lnTo>
+                  <a:lnTo>
+                    <a:pt x="2363543" y="2611362"/>
+                  </a:lnTo>
+                  <a:lnTo>
+                    <a:pt x="2291920" y="2607302"/>
+                  </a:lnTo>
+                  <a:lnTo>
+                    <a:pt x="2220298" y="2603224"/>
+                  </a:lnTo>
+                  <a:lnTo>
+                    <a:pt x="2148675" y="2599126"/>
+                  </a:lnTo>
+                  <a:lnTo>
+                    <a:pt x="2077053" y="2595010"/>
+                  </a:lnTo>
+                  <a:lnTo>
+                    <a:pt x="2005430" y="2590874"/>
+                  </a:lnTo>
+                  <a:lnTo>
+                    <a:pt x="1933808" y="2586719"/>
+                  </a:lnTo>
+                  <a:lnTo>
+                    <a:pt x="1862185" y="2582545"/>
+                  </a:lnTo>
+                  <a:lnTo>
+                    <a:pt x="1790563" y="2578351"/>
+                  </a:lnTo>
+                  <a:lnTo>
+                    <a:pt x="1718940" y="2574138"/>
+                  </a:lnTo>
+                  <a:lnTo>
+                    <a:pt x="1647318" y="2569905"/>
+                  </a:lnTo>
+                  <a:lnTo>
+                    <a:pt x="1575695" y="2565653"/>
+                  </a:lnTo>
+                  <a:lnTo>
+                    <a:pt x="1504073" y="2561381"/>
+                  </a:lnTo>
+                  <a:lnTo>
+                    <a:pt x="1432450" y="2557088"/>
+                  </a:lnTo>
+                  <a:lnTo>
+                    <a:pt x="1360827" y="2552776"/>
+                  </a:lnTo>
+                  <a:lnTo>
+                    <a:pt x="1289205" y="2548444"/>
+                  </a:lnTo>
+                  <a:lnTo>
+                    <a:pt x="1217582" y="2544092"/>
+                  </a:lnTo>
+                  <a:lnTo>
+                    <a:pt x="1145960" y="2539719"/>
+                  </a:lnTo>
+                  <a:lnTo>
+                    <a:pt x="1074337" y="2535326"/>
+                  </a:lnTo>
+                  <a:lnTo>
+                    <a:pt x="1002715" y="2530913"/>
+                  </a:lnTo>
+                  <a:lnTo>
+                    <a:pt x="931092" y="2526479"/>
+                  </a:lnTo>
+                  <a:lnTo>
+                    <a:pt x="859470" y="2522024"/>
+                  </a:lnTo>
+                  <a:lnTo>
+                    <a:pt x="787847" y="2517549"/>
+                  </a:lnTo>
+                  <a:lnTo>
+                    <a:pt x="716225" y="2513053"/>
+                  </a:lnTo>
+                  <a:lnTo>
+                    <a:pt x="644602" y="2508536"/>
+                  </a:lnTo>
+                  <a:lnTo>
+                    <a:pt x="572980" y="2503998"/>
+                  </a:lnTo>
+                  <a:lnTo>
+                    <a:pt x="501357" y="2499439"/>
+                  </a:lnTo>
+                  <a:lnTo>
+                    <a:pt x="429735" y="2494858"/>
+                  </a:lnTo>
+                  <a:lnTo>
+                    <a:pt x="358112" y="2490257"/>
+                  </a:lnTo>
+                  <a:lnTo>
+                    <a:pt x="286490" y="2485634"/>
+                  </a:lnTo>
+                  <a:lnTo>
+                    <a:pt x="214867" y="2480989"/>
+                  </a:lnTo>
+                  <a:lnTo>
+                    <a:pt x="143245" y="2476323"/>
+                  </a:lnTo>
+                  <a:lnTo>
+                    <a:pt x="71622" y="2471635"/>
+                  </a:lnTo>
+                  <a:lnTo>
+                    <a:pt x="0" y="2466925"/>
                   </a:lnTo>
                   <a:close/>
                 </a:path>
@@ -4008,300 +4005,297 @@
           </p:nvSpPr>
           <p:spPr>
             <a:xfrm>
-              <a:off x="1498220" y="2073503"/>
-              <a:ext cx="6764458" cy="2811712"/>
+              <a:off x="1556801" y="2073503"/>
+              <a:ext cx="6705877" cy="2841599"/>
             </a:xfrm>
             <a:custGeom>
               <a:avLst/>
               <a:pathLst>
-                <a:path w="6764458" h="2811712">
+                <a:path w="6705877" h="2841599">
                   <a:moveTo>
                     <a:pt x="0" y="0"/>
                   </a:moveTo>
                   <a:lnTo>
-                    <a:pt x="31941" y="56818"/>
-                  </a:lnTo>
-                  <a:lnTo>
-                    <a:pt x="103563" y="179656"/>
-                  </a:lnTo>
-                  <a:lnTo>
-                    <a:pt x="175186" y="298091"/>
-                  </a:lnTo>
-                  <a:lnTo>
-                    <a:pt x="246808" y="412281"/>
-                  </a:lnTo>
-                  <a:lnTo>
-                    <a:pt x="318431" y="522378"/>
-                  </a:lnTo>
-                  <a:lnTo>
-                    <a:pt x="390053" y="628528"/>
-                  </a:lnTo>
-                  <a:lnTo>
-                    <a:pt x="461676" y="730873"/>
-                  </a:lnTo>
-                  <a:lnTo>
-                    <a:pt x="533299" y="829550"/>
-                  </a:lnTo>
-                  <a:lnTo>
-                    <a:pt x="604921" y="924689"/>
-                  </a:lnTo>
-                  <a:lnTo>
-                    <a:pt x="676544" y="1016419"/>
-                  </a:lnTo>
-                  <a:lnTo>
-                    <a:pt x="748166" y="1104860"/>
-                  </a:lnTo>
-                  <a:lnTo>
-                    <a:pt x="819789" y="1190131"/>
-                  </a:lnTo>
-                  <a:lnTo>
-                    <a:pt x="891411" y="1272346"/>
-                  </a:lnTo>
-                  <a:lnTo>
-                    <a:pt x="963034" y="1351613"/>
-                  </a:lnTo>
-                  <a:lnTo>
-                    <a:pt x="1034656" y="1428040"/>
-                  </a:lnTo>
-                  <a:lnTo>
-                    <a:pt x="1106279" y="1501726"/>
-                  </a:lnTo>
-                  <a:lnTo>
-                    <a:pt x="1177901" y="1572772"/>
-                  </a:lnTo>
-                  <a:lnTo>
-                    <a:pt x="1249524" y="1641271"/>
-                  </a:lnTo>
-                  <a:lnTo>
-                    <a:pt x="1321146" y="1707314"/>
-                  </a:lnTo>
-                  <a:lnTo>
-                    <a:pt x="1392769" y="1770990"/>
-                  </a:lnTo>
-                  <a:lnTo>
-                    <a:pt x="1464391" y="1832384"/>
-                  </a:lnTo>
-                  <a:lnTo>
-                    <a:pt x="1536014" y="1891577"/>
-                  </a:lnTo>
-                  <a:lnTo>
-                    <a:pt x="1607636" y="1948648"/>
-                  </a:lnTo>
-                  <a:lnTo>
-                    <a:pt x="1679259" y="2003674"/>
-                  </a:lnTo>
-                  <a:lnTo>
-                    <a:pt x="1750881" y="2056727"/>
-                  </a:lnTo>
-                  <a:lnTo>
-                    <a:pt x="1822504" y="2107879"/>
-                  </a:lnTo>
-                  <a:lnTo>
-                    <a:pt x="1894127" y="2157197"/>
-                  </a:lnTo>
-                  <a:lnTo>
-                    <a:pt x="1965749" y="2204747"/>
-                  </a:lnTo>
-                  <a:lnTo>
-                    <a:pt x="2037372" y="2250592"/>
-                  </a:lnTo>
-                  <a:lnTo>
-                    <a:pt x="2108994" y="2294795"/>
-                  </a:lnTo>
-                  <a:lnTo>
-                    <a:pt x="2180617" y="2337413"/>
-                  </a:lnTo>
-                  <a:lnTo>
-                    <a:pt x="2252239" y="2378503"/>
-                  </a:lnTo>
-                  <a:lnTo>
-                    <a:pt x="2323862" y="2418120"/>
-                  </a:lnTo>
-                  <a:lnTo>
-                    <a:pt x="2395484" y="2456318"/>
-                  </a:lnTo>
-                  <a:lnTo>
-                    <a:pt x="2467107" y="2493146"/>
-                  </a:lnTo>
-                  <a:lnTo>
-                    <a:pt x="2538729" y="2528654"/>
-                  </a:lnTo>
-                  <a:lnTo>
-                    <a:pt x="2610352" y="2562889"/>
-                  </a:lnTo>
-                  <a:lnTo>
-                    <a:pt x="2681974" y="2595897"/>
-                  </a:lnTo>
-                  <a:lnTo>
-                    <a:pt x="2753597" y="2627722"/>
-                  </a:lnTo>
-                  <a:lnTo>
-                    <a:pt x="2825219" y="2654715"/>
-                  </a:lnTo>
-                  <a:lnTo>
-                    <a:pt x="2896842" y="2657874"/>
-                  </a:lnTo>
-                  <a:lnTo>
-                    <a:pt x="2968464" y="2661020"/>
-                  </a:lnTo>
-                  <a:lnTo>
-                    <a:pt x="3040087" y="2664155"/>
-                  </a:lnTo>
-                  <a:lnTo>
-                    <a:pt x="3111709" y="2667277"/>
-                  </a:lnTo>
-                  <a:lnTo>
-                    <a:pt x="3183332" y="2670388"/>
-                  </a:lnTo>
-                  <a:lnTo>
-                    <a:pt x="3254955" y="2673487"/>
-                  </a:lnTo>
-                  <a:lnTo>
-                    <a:pt x="3326577" y="2676574"/>
-                  </a:lnTo>
-                  <a:lnTo>
-                    <a:pt x="3398200" y="2679649"/>
-                  </a:lnTo>
-                  <a:lnTo>
-                    <a:pt x="3469822" y="2682713"/>
-                  </a:lnTo>
-                  <a:lnTo>
-                    <a:pt x="3541445" y="2685765"/>
-                  </a:lnTo>
-                  <a:lnTo>
-                    <a:pt x="3613067" y="2688805"/>
-                  </a:lnTo>
-                  <a:lnTo>
-                    <a:pt x="3684690" y="2691834"/>
-                  </a:lnTo>
-                  <a:lnTo>
-                    <a:pt x="3756312" y="2694851"/>
-                  </a:lnTo>
-                  <a:lnTo>
-                    <a:pt x="3827935" y="2697857"/>
-                  </a:lnTo>
-                  <a:lnTo>
-                    <a:pt x="3899557" y="2700851"/>
-                  </a:lnTo>
-                  <a:lnTo>
-                    <a:pt x="3971180" y="2703834"/>
-                  </a:lnTo>
-                  <a:lnTo>
-                    <a:pt x="4042802" y="2706805"/>
-                  </a:lnTo>
-                  <a:lnTo>
-                    <a:pt x="4114425" y="2709765"/>
-                  </a:lnTo>
-                  <a:lnTo>
-                    <a:pt x="4186047" y="2712714"/>
-                  </a:lnTo>
-                  <a:lnTo>
-                    <a:pt x="4257670" y="2715652"/>
-                  </a:lnTo>
-                  <a:lnTo>
-                    <a:pt x="4329292" y="2718578"/>
-                  </a:lnTo>
-                  <a:lnTo>
-                    <a:pt x="4400915" y="2721493"/>
-                  </a:lnTo>
-                  <a:lnTo>
-                    <a:pt x="4472537" y="2724398"/>
-                  </a:lnTo>
-                  <a:lnTo>
-                    <a:pt x="4544160" y="2727291"/>
-                  </a:lnTo>
-                  <a:lnTo>
-                    <a:pt x="4615783" y="2730173"/>
-                  </a:lnTo>
-                  <a:lnTo>
-                    <a:pt x="4687405" y="2733044"/>
-                  </a:lnTo>
-                  <a:lnTo>
-                    <a:pt x="4759028" y="2735904"/>
-                  </a:lnTo>
-                  <a:lnTo>
-                    <a:pt x="4830650" y="2738753"/>
-                  </a:lnTo>
-                  <a:lnTo>
-                    <a:pt x="4902273" y="2741592"/>
-                  </a:lnTo>
-                  <a:lnTo>
-                    <a:pt x="4973895" y="2744419"/>
-                  </a:lnTo>
-                  <a:lnTo>
-                    <a:pt x="5045518" y="2747236"/>
-                  </a:lnTo>
-                  <a:lnTo>
-                    <a:pt x="5117140" y="2750042"/>
-                  </a:lnTo>
-                  <a:lnTo>
-                    <a:pt x="5188763" y="2752838"/>
-                  </a:lnTo>
-                  <a:lnTo>
-                    <a:pt x="5260385" y="2755622"/>
-                  </a:lnTo>
-                  <a:lnTo>
-                    <a:pt x="5332008" y="2758396"/>
-                  </a:lnTo>
-                  <a:lnTo>
-                    <a:pt x="5403630" y="2761160"/>
-                  </a:lnTo>
-                  <a:lnTo>
-                    <a:pt x="5475253" y="2763913"/>
-                  </a:lnTo>
-                  <a:lnTo>
-                    <a:pt x="5546875" y="2766656"/>
-                  </a:lnTo>
-                  <a:lnTo>
-                    <a:pt x="5618498" y="2769388"/>
-                  </a:lnTo>
-                  <a:lnTo>
-                    <a:pt x="5690120" y="2772109"/>
-                  </a:lnTo>
-                  <a:lnTo>
-                    <a:pt x="5761743" y="2774821"/>
-                  </a:lnTo>
-                  <a:lnTo>
-                    <a:pt x="5833365" y="2777522"/>
-                  </a:lnTo>
-                  <a:lnTo>
-                    <a:pt x="5904988" y="2780212"/>
-                  </a:lnTo>
-                  <a:lnTo>
-                    <a:pt x="5976611" y="2782893"/>
-                  </a:lnTo>
-                  <a:lnTo>
-                    <a:pt x="6048233" y="2785563"/>
-                  </a:lnTo>
-                  <a:lnTo>
-                    <a:pt x="6119856" y="2788223"/>
-                  </a:lnTo>
-                  <a:lnTo>
-                    <a:pt x="6191478" y="2790873"/>
-                  </a:lnTo>
-                  <a:lnTo>
-                    <a:pt x="6263101" y="2793513"/>
-                  </a:lnTo>
-                  <a:lnTo>
-                    <a:pt x="6334723" y="2796143"/>
-                  </a:lnTo>
-                  <a:lnTo>
-                    <a:pt x="6406346" y="2798762"/>
-                  </a:lnTo>
-                  <a:lnTo>
-                    <a:pt x="6477968" y="2801372"/>
-                  </a:lnTo>
-                  <a:lnTo>
-                    <a:pt x="6549591" y="2803972"/>
-                  </a:lnTo>
-                  <a:lnTo>
-                    <a:pt x="6621213" y="2806562"/>
-                  </a:lnTo>
-                  <a:lnTo>
-                    <a:pt x="6692836" y="2809142"/>
-                  </a:lnTo>
-                  <a:lnTo>
-                    <a:pt x="6764458" y="2811712"/>
+                    <a:pt x="44982" y="81161"/>
+                  </a:lnTo>
+                  <a:lnTo>
+                    <a:pt x="116605" y="205659"/>
+                  </a:lnTo>
+                  <a:lnTo>
+                    <a:pt x="188227" y="325602"/>
+                  </a:lnTo>
+                  <a:lnTo>
+                    <a:pt x="259850" y="441157"/>
+                  </a:lnTo>
+                  <a:lnTo>
+                    <a:pt x="331472" y="552483"/>
+                  </a:lnTo>
+                  <a:lnTo>
+                    <a:pt x="403095" y="659736"/>
+                  </a:lnTo>
+                  <a:lnTo>
+                    <a:pt x="474718" y="763065"/>
+                  </a:lnTo>
+                  <a:lnTo>
+                    <a:pt x="546340" y="862612"/>
+                  </a:lnTo>
+                  <a:lnTo>
+                    <a:pt x="617963" y="958518"/>
+                  </a:lnTo>
+                  <a:lnTo>
+                    <a:pt x="689585" y="1050914"/>
+                  </a:lnTo>
+                  <a:lnTo>
+                    <a:pt x="761208" y="1139930"/>
+                  </a:lnTo>
+                  <a:lnTo>
+                    <a:pt x="832830" y="1225689"/>
+                  </a:lnTo>
+                  <a:lnTo>
+                    <a:pt x="904453" y="1308310"/>
+                  </a:lnTo>
+                  <a:lnTo>
+                    <a:pt x="976075" y="1387907"/>
+                  </a:lnTo>
+                  <a:lnTo>
+                    <a:pt x="1047698" y="1464593"/>
+                  </a:lnTo>
+                  <a:lnTo>
+                    <a:pt x="1119320" y="1538472"/>
+                  </a:lnTo>
+                  <a:lnTo>
+                    <a:pt x="1190943" y="1609648"/>
+                  </a:lnTo>
+                  <a:lnTo>
+                    <a:pt x="1262565" y="1678220"/>
+                  </a:lnTo>
+                  <a:lnTo>
+                    <a:pt x="1334188" y="1744283"/>
+                  </a:lnTo>
+                  <a:lnTo>
+                    <a:pt x="1405810" y="1807929"/>
+                  </a:lnTo>
+                  <a:lnTo>
+                    <a:pt x="1477433" y="1869246"/>
+                  </a:lnTo>
+                  <a:lnTo>
+                    <a:pt x="1549055" y="1928320"/>
+                  </a:lnTo>
+                  <a:lnTo>
+                    <a:pt x="1620678" y="1985232"/>
+                  </a:lnTo>
+                  <a:lnTo>
+                    <a:pt x="1692300" y="2040061"/>
+                  </a:lnTo>
+                  <a:lnTo>
+                    <a:pt x="1763923" y="2092885"/>
+                  </a:lnTo>
+                  <a:lnTo>
+                    <a:pt x="1835545" y="2143776"/>
+                  </a:lnTo>
+                  <a:lnTo>
+                    <a:pt x="1907168" y="2192804"/>
+                  </a:lnTo>
+                  <a:lnTo>
+                    <a:pt x="1978791" y="2240039"/>
+                  </a:lnTo>
+                  <a:lnTo>
+                    <a:pt x="2050413" y="2285545"/>
+                  </a:lnTo>
+                  <a:lnTo>
+                    <a:pt x="2122036" y="2329387"/>
+                  </a:lnTo>
+                  <a:lnTo>
+                    <a:pt x="2193658" y="2371624"/>
+                  </a:lnTo>
+                  <a:lnTo>
+                    <a:pt x="2265281" y="2412316"/>
+                  </a:lnTo>
+                  <a:lnTo>
+                    <a:pt x="2336903" y="2451519"/>
+                  </a:lnTo>
+                  <a:lnTo>
+                    <a:pt x="2408526" y="2489287"/>
+                  </a:lnTo>
+                  <a:lnTo>
+                    <a:pt x="2480148" y="2525674"/>
+                  </a:lnTo>
+                  <a:lnTo>
+                    <a:pt x="2551771" y="2560729"/>
+                  </a:lnTo>
+                  <a:lnTo>
+                    <a:pt x="2623393" y="2594502"/>
+                  </a:lnTo>
+                  <a:lnTo>
+                    <a:pt x="2695016" y="2627038"/>
+                  </a:lnTo>
+                  <a:lnTo>
+                    <a:pt x="2766638" y="2654795"/>
+                  </a:lnTo>
+                  <a:lnTo>
+                    <a:pt x="2838261" y="2658634"/>
+                  </a:lnTo>
+                  <a:lnTo>
+                    <a:pt x="2909883" y="2662456"/>
+                  </a:lnTo>
+                  <a:lnTo>
+                    <a:pt x="2981506" y="2666260"/>
+                  </a:lnTo>
+                  <a:lnTo>
+                    <a:pt x="3053128" y="2670047"/>
+                  </a:lnTo>
+                  <a:lnTo>
+                    <a:pt x="3124751" y="2673816"/>
+                  </a:lnTo>
+                  <a:lnTo>
+                    <a:pt x="3196373" y="2677567"/>
+                  </a:lnTo>
+                  <a:lnTo>
+                    <a:pt x="3267996" y="2681301"/>
+                  </a:lnTo>
+                  <a:lnTo>
+                    <a:pt x="3339619" y="2685018"/>
+                  </a:lnTo>
+                  <a:lnTo>
+                    <a:pt x="3411241" y="2688718"/>
+                  </a:lnTo>
+                  <a:lnTo>
+                    <a:pt x="3482864" y="2692400"/>
+                  </a:lnTo>
+                  <a:lnTo>
+                    <a:pt x="3554486" y="2696066"/>
+                  </a:lnTo>
+                  <a:lnTo>
+                    <a:pt x="3626109" y="2699714"/>
+                  </a:lnTo>
+                  <a:lnTo>
+                    <a:pt x="3697731" y="2703346"/>
+                  </a:lnTo>
+                  <a:lnTo>
+                    <a:pt x="3769354" y="2706960"/>
+                  </a:lnTo>
+                  <a:lnTo>
+                    <a:pt x="3840976" y="2710558"/>
+                  </a:lnTo>
+                  <a:lnTo>
+                    <a:pt x="3912599" y="2714140"/>
+                  </a:lnTo>
+                  <a:lnTo>
+                    <a:pt x="3984221" y="2717704"/>
+                  </a:lnTo>
+                  <a:lnTo>
+                    <a:pt x="4055844" y="2721252"/>
+                  </a:lnTo>
+                  <a:lnTo>
+                    <a:pt x="4127466" y="2724784"/>
+                  </a:lnTo>
+                  <a:lnTo>
+                    <a:pt x="4199089" y="2728300"/>
+                  </a:lnTo>
+                  <a:lnTo>
+                    <a:pt x="4270711" y="2731799"/>
+                  </a:lnTo>
+                  <a:lnTo>
+                    <a:pt x="4342334" y="2735282"/>
+                  </a:lnTo>
+                  <a:lnTo>
+                    <a:pt x="4413956" y="2738748"/>
+                  </a:lnTo>
+                  <a:lnTo>
+                    <a:pt x="4485579" y="2742199"/>
+                  </a:lnTo>
+                  <a:lnTo>
+                    <a:pt x="4557201" y="2745634"/>
+                  </a:lnTo>
+                  <a:lnTo>
+                    <a:pt x="4628824" y="2749053"/>
+                  </a:lnTo>
+                  <a:lnTo>
+                    <a:pt x="4700447" y="2752456"/>
+                  </a:lnTo>
+                  <a:lnTo>
+                    <a:pt x="4772069" y="2755843"/>
+                  </a:lnTo>
+                  <a:lnTo>
+                    <a:pt x="4843692" y="2759214"/>
+                  </a:lnTo>
+                  <a:lnTo>
+                    <a:pt x="4915314" y="2762570"/>
+                  </a:lnTo>
+                  <a:lnTo>
+                    <a:pt x="4986937" y="2765911"/>
+                  </a:lnTo>
+                  <a:lnTo>
+                    <a:pt x="5058559" y="2769236"/>
+                  </a:lnTo>
+                  <a:lnTo>
+                    <a:pt x="5130182" y="2772545"/>
+                  </a:lnTo>
+                  <a:lnTo>
+                    <a:pt x="5201804" y="2775839"/>
+                  </a:lnTo>
+                  <a:lnTo>
+                    <a:pt x="5273427" y="2779118"/>
+                  </a:lnTo>
+                  <a:lnTo>
+                    <a:pt x="5345049" y="2782382"/>
+                  </a:lnTo>
+                  <a:lnTo>
+                    <a:pt x="5416672" y="2785631"/>
+                  </a:lnTo>
+                  <a:lnTo>
+                    <a:pt x="5488294" y="2788864"/>
+                  </a:lnTo>
+                  <a:lnTo>
+                    <a:pt x="5559917" y="2792083"/>
+                  </a:lnTo>
+                  <a:lnTo>
+                    <a:pt x="5631539" y="2795287"/>
+                  </a:lnTo>
+                  <a:lnTo>
+                    <a:pt x="5703162" y="2798475"/>
+                  </a:lnTo>
+                  <a:lnTo>
+                    <a:pt x="5774784" y="2801649"/>
+                  </a:lnTo>
+                  <a:lnTo>
+                    <a:pt x="5846407" y="2804809"/>
+                  </a:lnTo>
+                  <a:lnTo>
+                    <a:pt x="5918029" y="2807954"/>
+                  </a:lnTo>
+                  <a:lnTo>
+                    <a:pt x="5989652" y="2811084"/>
+                  </a:lnTo>
+                  <a:lnTo>
+                    <a:pt x="6061275" y="2814199"/>
+                  </a:lnTo>
+                  <a:lnTo>
+                    <a:pt x="6132897" y="2817301"/>
+                  </a:lnTo>
+                  <a:lnTo>
+                    <a:pt x="6204520" y="2820388"/>
+                  </a:lnTo>
+                  <a:lnTo>
+                    <a:pt x="6276142" y="2823460"/>
+                  </a:lnTo>
+                  <a:lnTo>
+                    <a:pt x="6347765" y="2826518"/>
+                  </a:lnTo>
+                  <a:lnTo>
+                    <a:pt x="6419387" y="2829563"/>
+                  </a:lnTo>
+                  <a:lnTo>
+                    <a:pt x="6491010" y="2832593"/>
+                  </a:lnTo>
+                  <a:lnTo>
+                    <a:pt x="6562632" y="2835609"/>
+                  </a:lnTo>
+                  <a:lnTo>
+                    <a:pt x="6634255" y="2838611"/>
+                  </a:lnTo>
+                  <a:lnTo>
+                    <a:pt x="6705877" y="2841599"/>
                   </a:lnTo>
                 </a:path>
               </a:pathLst>
@@ -4321,309 +4315,309 @@
           </p:nvSpPr>
           <p:spPr>
             <a:xfrm>
-              <a:off x="1172049" y="4576598"/>
-              <a:ext cx="7090630" cy="869807"/>
+              <a:off x="1172049" y="4540428"/>
+              <a:ext cx="7090630" cy="910584"/>
             </a:xfrm>
             <a:custGeom>
               <a:avLst/>
               <a:pathLst>
-                <a:path w="7090630" h="869807">
+                <a:path w="7090630" h="910584">
                   <a:moveTo>
-                    <a:pt x="7090630" y="869807"/>
+                    <a:pt x="7090630" y="910584"/>
                   </a:moveTo>
                   <a:lnTo>
-                    <a:pt x="7019007" y="865686"/>
-                  </a:lnTo>
-                  <a:lnTo>
-                    <a:pt x="6947385" y="861412"/>
-                  </a:lnTo>
-                  <a:lnTo>
-                    <a:pt x="6875762" y="856979"/>
-                  </a:lnTo>
-                  <a:lnTo>
-                    <a:pt x="6804139" y="852381"/>
-                  </a:lnTo>
-                  <a:lnTo>
-                    <a:pt x="6732517" y="847613"/>
-                  </a:lnTo>
-                  <a:lnTo>
-                    <a:pt x="6660894" y="842667"/>
-                  </a:lnTo>
-                  <a:lnTo>
-                    <a:pt x="6589272" y="837537"/>
-                  </a:lnTo>
-                  <a:lnTo>
-                    <a:pt x="6517649" y="832216"/>
-                  </a:lnTo>
-                  <a:lnTo>
-                    <a:pt x="6446027" y="826698"/>
-                  </a:lnTo>
-                  <a:lnTo>
-                    <a:pt x="6374404" y="820974"/>
-                  </a:lnTo>
-                  <a:lnTo>
-                    <a:pt x="6302782" y="815037"/>
-                  </a:lnTo>
-                  <a:lnTo>
-                    <a:pt x="6231159" y="808880"/>
-                  </a:lnTo>
-                  <a:lnTo>
-                    <a:pt x="6159537" y="802494"/>
-                  </a:lnTo>
-                  <a:lnTo>
-                    <a:pt x="6087914" y="795871"/>
-                  </a:lnTo>
-                  <a:lnTo>
-                    <a:pt x="6016292" y="789001"/>
-                  </a:lnTo>
-                  <a:lnTo>
-                    <a:pt x="5944669" y="781876"/>
-                  </a:lnTo>
-                  <a:lnTo>
-                    <a:pt x="5873047" y="774486"/>
-                  </a:lnTo>
-                  <a:lnTo>
-                    <a:pt x="5801424" y="766822"/>
-                  </a:lnTo>
-                  <a:lnTo>
-                    <a:pt x="5729802" y="758872"/>
-                  </a:lnTo>
-                  <a:lnTo>
-                    <a:pt x="5658179" y="750627"/>
-                  </a:lnTo>
-                  <a:lnTo>
-                    <a:pt x="5586557" y="742075"/>
-                  </a:lnTo>
-                  <a:lnTo>
-                    <a:pt x="5514934" y="733205"/>
-                  </a:lnTo>
-                  <a:lnTo>
-                    <a:pt x="5443311" y="724006"/>
-                  </a:lnTo>
-                  <a:lnTo>
-                    <a:pt x="5371689" y="714464"/>
-                  </a:lnTo>
-                  <a:lnTo>
-                    <a:pt x="5300066" y="704568"/>
-                  </a:lnTo>
-                  <a:lnTo>
-                    <a:pt x="5228444" y="694304"/>
-                  </a:lnTo>
-                  <a:lnTo>
-                    <a:pt x="5156821" y="683658"/>
-                  </a:lnTo>
-                  <a:lnTo>
-                    <a:pt x="5085199" y="672617"/>
-                  </a:lnTo>
-                  <a:lnTo>
-                    <a:pt x="5013576" y="661165"/>
-                  </a:lnTo>
-                  <a:lnTo>
-                    <a:pt x="4941954" y="649287"/>
-                  </a:lnTo>
-                  <a:lnTo>
-                    <a:pt x="4870331" y="636968"/>
-                  </a:lnTo>
-                  <a:lnTo>
-                    <a:pt x="4798709" y="624191"/>
-                  </a:lnTo>
-                  <a:lnTo>
-                    <a:pt x="4727086" y="610938"/>
-                  </a:lnTo>
-                  <a:lnTo>
-                    <a:pt x="4655464" y="597193"/>
-                  </a:lnTo>
-                  <a:lnTo>
-                    <a:pt x="4583841" y="582937"/>
-                  </a:lnTo>
-                  <a:lnTo>
-                    <a:pt x="4512219" y="568151"/>
-                  </a:lnTo>
-                  <a:lnTo>
-                    <a:pt x="4440596" y="552816"/>
-                  </a:lnTo>
-                  <a:lnTo>
-                    <a:pt x="4368974" y="536910"/>
-                  </a:lnTo>
-                  <a:lnTo>
-                    <a:pt x="4297351" y="520412"/>
-                  </a:lnTo>
-                  <a:lnTo>
-                    <a:pt x="4225729" y="503302"/>
-                  </a:lnTo>
-                  <a:lnTo>
-                    <a:pt x="4154106" y="485555"/>
-                  </a:lnTo>
-                  <a:lnTo>
-                    <a:pt x="4082483" y="467149"/>
-                  </a:lnTo>
-                  <a:lnTo>
-                    <a:pt x="4010861" y="448058"/>
-                  </a:lnTo>
-                  <a:lnTo>
-                    <a:pt x="3939238" y="428257"/>
-                  </a:lnTo>
-                  <a:lnTo>
-                    <a:pt x="3867616" y="407721"/>
-                  </a:lnTo>
-                  <a:lnTo>
-                    <a:pt x="3795993" y="386421"/>
-                  </a:lnTo>
-                  <a:lnTo>
-                    <a:pt x="3724371" y="364329"/>
-                  </a:lnTo>
-                  <a:lnTo>
-                    <a:pt x="3652748" y="341415"/>
-                  </a:lnTo>
-                  <a:lnTo>
-                    <a:pt x="3581126" y="317650"/>
-                  </a:lnTo>
-                  <a:lnTo>
-                    <a:pt x="3509503" y="293001"/>
-                  </a:lnTo>
-                  <a:lnTo>
-                    <a:pt x="3437881" y="267436"/>
-                  </a:lnTo>
-                  <a:lnTo>
-                    <a:pt x="3366258" y="240920"/>
-                  </a:lnTo>
-                  <a:lnTo>
-                    <a:pt x="3294636" y="213419"/>
-                  </a:lnTo>
-                  <a:lnTo>
-                    <a:pt x="3223013" y="184895"/>
-                  </a:lnTo>
-                  <a:lnTo>
-                    <a:pt x="3151391" y="155311"/>
-                  </a:lnTo>
-                  <a:lnTo>
-                    <a:pt x="3079768" y="148449"/>
-                  </a:lnTo>
-                  <a:lnTo>
-                    <a:pt x="3008146" y="145266"/>
-                  </a:lnTo>
-                  <a:lnTo>
-                    <a:pt x="2936523" y="142071"/>
-                  </a:lnTo>
-                  <a:lnTo>
-                    <a:pt x="2864901" y="138864"/>
-                  </a:lnTo>
-                  <a:lnTo>
-                    <a:pt x="2793278" y="135644"/>
-                  </a:lnTo>
-                  <a:lnTo>
-                    <a:pt x="2721655" y="132413"/>
-                  </a:lnTo>
-                  <a:lnTo>
-                    <a:pt x="2650033" y="129168"/>
-                  </a:lnTo>
-                  <a:lnTo>
-                    <a:pt x="2578410" y="125912"/>
-                  </a:lnTo>
-                  <a:lnTo>
-                    <a:pt x="2506788" y="122643"/>
-                  </a:lnTo>
-                  <a:lnTo>
-                    <a:pt x="2435165" y="119361"/>
-                  </a:lnTo>
-                  <a:lnTo>
-                    <a:pt x="2363543" y="116067"/>
-                  </a:lnTo>
-                  <a:lnTo>
-                    <a:pt x="2291920" y="112761"/>
-                  </a:lnTo>
-                  <a:lnTo>
-                    <a:pt x="2220298" y="109441"/>
-                  </a:lnTo>
-                  <a:lnTo>
-                    <a:pt x="2148675" y="106109"/>
-                  </a:lnTo>
-                  <a:lnTo>
-                    <a:pt x="2077053" y="102765"/>
-                  </a:lnTo>
-                  <a:lnTo>
-                    <a:pt x="2005430" y="99407"/>
-                  </a:lnTo>
-                  <a:lnTo>
-                    <a:pt x="1933808" y="96037"/>
-                  </a:lnTo>
-                  <a:lnTo>
-                    <a:pt x="1862185" y="92654"/>
-                  </a:lnTo>
-                  <a:lnTo>
-                    <a:pt x="1790563" y="89257"/>
-                  </a:lnTo>
-                  <a:lnTo>
-                    <a:pt x="1718940" y="85848"/>
-                  </a:lnTo>
-                  <a:lnTo>
-                    <a:pt x="1647318" y="82426"/>
-                  </a:lnTo>
-                  <a:lnTo>
-                    <a:pt x="1575695" y="78991"/>
-                  </a:lnTo>
-                  <a:lnTo>
-                    <a:pt x="1504073" y="75542"/>
-                  </a:lnTo>
-                  <a:lnTo>
-                    <a:pt x="1432450" y="72081"/>
-                  </a:lnTo>
-                  <a:lnTo>
-                    <a:pt x="1360827" y="68606"/>
-                  </a:lnTo>
-                  <a:lnTo>
-                    <a:pt x="1289205" y="65118"/>
-                  </a:lnTo>
-                  <a:lnTo>
-                    <a:pt x="1217582" y="61616"/>
-                  </a:lnTo>
-                  <a:lnTo>
-                    <a:pt x="1145960" y="58101"/>
-                  </a:lnTo>
-                  <a:lnTo>
-                    <a:pt x="1074337" y="54573"/>
-                  </a:lnTo>
-                  <a:lnTo>
-                    <a:pt x="1002715" y="51031"/>
-                  </a:lnTo>
-                  <a:lnTo>
-                    <a:pt x="931092" y="47476"/>
-                  </a:lnTo>
-                  <a:lnTo>
-                    <a:pt x="859470" y="43907"/>
-                  </a:lnTo>
-                  <a:lnTo>
-                    <a:pt x="787847" y="40324"/>
-                  </a:lnTo>
-                  <a:lnTo>
-                    <a:pt x="716225" y="36728"/>
-                  </a:lnTo>
-                  <a:lnTo>
-                    <a:pt x="644602" y="33118"/>
-                  </a:lnTo>
-                  <a:lnTo>
-                    <a:pt x="572980" y="29494"/>
-                  </a:lnTo>
-                  <a:lnTo>
-                    <a:pt x="501357" y="25856"/>
-                  </a:lnTo>
-                  <a:lnTo>
-                    <a:pt x="429735" y="22205"/>
-                  </a:lnTo>
-                  <a:lnTo>
-                    <a:pt x="358112" y="18539"/>
-                  </a:lnTo>
-                  <a:lnTo>
-                    <a:pt x="286490" y="14859"/>
-                  </a:lnTo>
-                  <a:lnTo>
-                    <a:pt x="214867" y="11166"/>
-                  </a:lnTo>
-                  <a:lnTo>
-                    <a:pt x="143245" y="7458"/>
-                  </a:lnTo>
-                  <a:lnTo>
-                    <a:pt x="71622" y="3736"/>
+                    <a:pt x="7019007" y="906550"/>
+                  </a:lnTo>
+                  <a:lnTo>
+                    <a:pt x="6947385" y="902362"/>
+                  </a:lnTo>
+                  <a:lnTo>
+                    <a:pt x="6875762" y="898015"/>
+                  </a:lnTo>
+                  <a:lnTo>
+                    <a:pt x="6804139" y="893502"/>
+                  </a:lnTo>
+                  <a:lnTo>
+                    <a:pt x="6732517" y="888819"/>
+                  </a:lnTo>
+                  <a:lnTo>
+                    <a:pt x="6660894" y="883958"/>
+                  </a:lnTo>
+                  <a:lnTo>
+                    <a:pt x="6589272" y="878912"/>
+                  </a:lnTo>
+                  <a:lnTo>
+                    <a:pt x="6517649" y="873674"/>
+                  </a:lnTo>
+                  <a:lnTo>
+                    <a:pt x="6446027" y="868237"/>
+                  </a:lnTo>
+                  <a:lnTo>
+                    <a:pt x="6374404" y="862594"/>
+                  </a:lnTo>
+                  <a:lnTo>
+                    <a:pt x="6302782" y="856737"/>
+                  </a:lnTo>
+                  <a:lnTo>
+                    <a:pt x="6231159" y="850657"/>
+                  </a:lnTo>
+                  <a:lnTo>
+                    <a:pt x="6159537" y="844346"/>
+                  </a:lnTo>
+                  <a:lnTo>
+                    <a:pt x="6087914" y="837796"/>
+                  </a:lnTo>
+                  <a:lnTo>
+                    <a:pt x="6016292" y="830997"/>
+                  </a:lnTo>
+                  <a:lnTo>
+                    <a:pt x="5944669" y="823939"/>
+                  </a:lnTo>
+                  <a:lnTo>
+                    <a:pt x="5873047" y="816614"/>
+                  </a:lnTo>
+                  <a:lnTo>
+                    <a:pt x="5801424" y="809010"/>
+                  </a:lnTo>
+                  <a:lnTo>
+                    <a:pt x="5729802" y="801118"/>
+                  </a:lnTo>
+                  <a:lnTo>
+                    <a:pt x="5658179" y="792926"/>
+                  </a:lnTo>
+                  <a:lnTo>
+                    <a:pt x="5586557" y="784422"/>
+                  </a:lnTo>
+                  <a:lnTo>
+                    <a:pt x="5514934" y="775596"/>
+                  </a:lnTo>
+                  <a:lnTo>
+                    <a:pt x="5443311" y="766435"/>
+                  </a:lnTo>
+                  <a:lnTo>
+                    <a:pt x="5371689" y="756925"/>
+                  </a:lnTo>
+                  <a:lnTo>
+                    <a:pt x="5300066" y="747055"/>
+                  </a:lnTo>
+                  <a:lnTo>
+                    <a:pt x="5228444" y="736809"/>
+                  </a:lnTo>
+                  <a:lnTo>
+                    <a:pt x="5156821" y="726175"/>
+                  </a:lnTo>
+                  <a:lnTo>
+                    <a:pt x="5085199" y="715136"/>
+                  </a:lnTo>
+                  <a:lnTo>
+                    <a:pt x="5013576" y="703678"/>
+                  </a:lnTo>
+                  <a:lnTo>
+                    <a:pt x="4941954" y="691786"/>
+                  </a:lnTo>
+                  <a:lnTo>
+                    <a:pt x="4870331" y="679441"/>
+                  </a:lnTo>
+                  <a:lnTo>
+                    <a:pt x="4798709" y="666628"/>
+                  </a:lnTo>
+                  <a:lnTo>
+                    <a:pt x="4727086" y="653328"/>
+                  </a:lnTo>
+                  <a:lnTo>
+                    <a:pt x="4655464" y="639523"/>
+                  </a:lnTo>
+                  <a:lnTo>
+                    <a:pt x="4583841" y="625193"/>
+                  </a:lnTo>
+                  <a:lnTo>
+                    <a:pt x="4512219" y="610320"/>
+                  </a:lnTo>
+                  <a:lnTo>
+                    <a:pt x="4440596" y="594881"/>
+                  </a:lnTo>
+                  <a:lnTo>
+                    <a:pt x="4368974" y="578856"/>
+                  </a:lnTo>
+                  <a:lnTo>
+                    <a:pt x="4297351" y="562223"/>
+                  </a:lnTo>
+                  <a:lnTo>
+                    <a:pt x="4225729" y="544958"/>
+                  </a:lnTo>
+                  <a:lnTo>
+                    <a:pt x="4154106" y="527037"/>
+                  </a:lnTo>
+                  <a:lnTo>
+                    <a:pt x="4082483" y="508436"/>
+                  </a:lnTo>
+                  <a:lnTo>
+                    <a:pt x="4010861" y="489128"/>
+                  </a:lnTo>
+                  <a:lnTo>
+                    <a:pt x="3939238" y="469086"/>
+                  </a:lnTo>
+                  <a:lnTo>
+                    <a:pt x="3867616" y="448284"/>
+                  </a:lnTo>
+                  <a:lnTo>
+                    <a:pt x="3795993" y="426691"/>
+                  </a:lnTo>
+                  <a:lnTo>
+                    <a:pt x="3724371" y="404279"/>
+                  </a:lnTo>
+                  <a:lnTo>
+                    <a:pt x="3652748" y="381015"/>
+                  </a:lnTo>
+                  <a:lnTo>
+                    <a:pt x="3581126" y="356868"/>
+                  </a:lnTo>
+                  <a:lnTo>
+                    <a:pt x="3509503" y="331804"/>
+                  </a:lnTo>
+                  <a:lnTo>
+                    <a:pt x="3437881" y="305787"/>
+                  </a:lnTo>
+                  <a:lnTo>
+                    <a:pt x="3366258" y="278783"/>
+                  </a:lnTo>
+                  <a:lnTo>
+                    <a:pt x="3294636" y="250753"/>
+                  </a:lnTo>
+                  <a:lnTo>
+                    <a:pt x="3223013" y="221659"/>
+                  </a:lnTo>
+                  <a:lnTo>
+                    <a:pt x="3151391" y="191459"/>
+                  </a:lnTo>
+                  <a:lnTo>
+                    <a:pt x="3079768" y="184012"/>
+                  </a:lnTo>
+                  <a:lnTo>
+                    <a:pt x="3008146" y="180137"/>
+                  </a:lnTo>
+                  <a:lnTo>
+                    <a:pt x="2936523" y="176243"/>
+                  </a:lnTo>
+                  <a:lnTo>
+                    <a:pt x="2864901" y="172332"/>
+                  </a:lnTo>
+                  <a:lnTo>
+                    <a:pt x="2793278" y="168402"/>
+                  </a:lnTo>
+                  <a:lnTo>
+                    <a:pt x="2721655" y="164454"/>
+                  </a:lnTo>
+                  <a:lnTo>
+                    <a:pt x="2650033" y="160487"/>
+                  </a:lnTo>
+                  <a:lnTo>
+                    <a:pt x="2578410" y="156502"/>
+                  </a:lnTo>
+                  <a:lnTo>
+                    <a:pt x="2506788" y="152499"/>
+                  </a:lnTo>
+                  <a:lnTo>
+                    <a:pt x="2435165" y="148477"/>
+                  </a:lnTo>
+                  <a:lnTo>
+                    <a:pt x="2363543" y="144436"/>
+                  </a:lnTo>
+                  <a:lnTo>
+                    <a:pt x="2291920" y="140377"/>
+                  </a:lnTo>
+                  <a:lnTo>
+                    <a:pt x="2220298" y="136298"/>
+                  </a:lnTo>
+                  <a:lnTo>
+                    <a:pt x="2148675" y="132201"/>
+                  </a:lnTo>
+                  <a:lnTo>
+                    <a:pt x="2077053" y="128084"/>
+                  </a:lnTo>
+                  <a:lnTo>
+                    <a:pt x="2005430" y="123949"/>
+                  </a:lnTo>
+                  <a:lnTo>
+                    <a:pt x="1933808" y="119794"/>
+                  </a:lnTo>
+                  <a:lnTo>
+                    <a:pt x="1862185" y="115620"/>
+                  </a:lnTo>
+                  <a:lnTo>
+                    <a:pt x="1790563" y="111426"/>
+                  </a:lnTo>
+                  <a:lnTo>
+                    <a:pt x="1718940" y="107213"/>
+                  </a:lnTo>
+                  <a:lnTo>
+                    <a:pt x="1647318" y="102980"/>
+                  </a:lnTo>
+                  <a:lnTo>
+                    <a:pt x="1575695" y="98727"/>
+                  </a:lnTo>
+                  <a:lnTo>
+                    <a:pt x="1504073" y="94455"/>
+                  </a:lnTo>
+                  <a:lnTo>
+                    <a:pt x="1432450" y="90163"/>
+                  </a:lnTo>
+                  <a:lnTo>
+                    <a:pt x="1360827" y="85851"/>
+                  </a:lnTo>
+                  <a:lnTo>
+                    <a:pt x="1289205" y="81519"/>
+                  </a:lnTo>
+                  <a:lnTo>
+                    <a:pt x="1217582" y="77166"/>
+                  </a:lnTo>
+                  <a:lnTo>
+                    <a:pt x="1145960" y="72794"/>
+                  </a:lnTo>
+                  <a:lnTo>
+                    <a:pt x="1074337" y="68401"/>
+                  </a:lnTo>
+                  <a:lnTo>
+                    <a:pt x="1002715" y="63987"/>
+                  </a:lnTo>
+                  <a:lnTo>
+                    <a:pt x="931092" y="59554"/>
+                  </a:lnTo>
+                  <a:lnTo>
+                    <a:pt x="859470" y="55099"/>
+                  </a:lnTo>
+                  <a:lnTo>
+                    <a:pt x="787847" y="50624"/>
+                  </a:lnTo>
+                  <a:lnTo>
+                    <a:pt x="716225" y="46128"/>
+                  </a:lnTo>
+                  <a:lnTo>
+                    <a:pt x="644602" y="41611"/>
+                  </a:lnTo>
+                  <a:lnTo>
+                    <a:pt x="572980" y="37072"/>
+                  </a:lnTo>
+                  <a:lnTo>
+                    <a:pt x="501357" y="32513"/>
+                  </a:lnTo>
+                  <a:lnTo>
+                    <a:pt x="429735" y="27933"/>
+                  </a:lnTo>
+                  <a:lnTo>
+                    <a:pt x="358112" y="23331"/>
+                  </a:lnTo>
+                  <a:lnTo>
+                    <a:pt x="286490" y="18708"/>
+                  </a:lnTo>
+                  <a:lnTo>
+                    <a:pt x="214867" y="14063"/>
+                  </a:lnTo>
+                  <a:lnTo>
+                    <a:pt x="143245" y="9397"/>
+                  </a:lnTo>
+                  <a:lnTo>
+                    <a:pt x="71622" y="4709"/>
                   </a:lnTo>
                   <a:lnTo>
                     <a:pt x="0" y="0"/>
@@ -4646,312 +4640,312 @@
           </p:nvSpPr>
           <p:spPr>
             <a:xfrm>
-              <a:off x="1172049" y="3548885"/>
-              <a:ext cx="7090630" cy="1735435"/>
+              <a:off x="1172049" y="3477110"/>
+              <a:ext cx="7090630" cy="1818951"/>
             </a:xfrm>
             <a:custGeom>
               <a:avLst/>
               <a:pathLst>
-                <a:path w="7090630" h="1735435">
+                <a:path w="7090630" h="1818951">
                   <a:moveTo>
                     <a:pt x="0" y="0"/>
                   </a:moveTo>
                   <a:lnTo>
-                    <a:pt x="71622" y="40083"/>
-                  </a:lnTo>
-                  <a:lnTo>
-                    <a:pt x="143245" y="79367"/>
-                  </a:lnTo>
-                  <a:lnTo>
-                    <a:pt x="214867" y="117866"/>
-                  </a:lnTo>
-                  <a:lnTo>
-                    <a:pt x="286490" y="155598"/>
-                  </a:lnTo>
-                  <a:lnTo>
-                    <a:pt x="358112" y="192576"/>
-                  </a:lnTo>
-                  <a:lnTo>
-                    <a:pt x="429735" y="228816"/>
-                  </a:lnTo>
-                  <a:lnTo>
-                    <a:pt x="501357" y="264333"/>
-                  </a:lnTo>
-                  <a:lnTo>
-                    <a:pt x="572980" y="299141"/>
-                  </a:lnTo>
-                  <a:lnTo>
-                    <a:pt x="644602" y="333254"/>
-                  </a:lnTo>
-                  <a:lnTo>
-                    <a:pt x="716225" y="366687"/>
-                  </a:lnTo>
-                  <a:lnTo>
-                    <a:pt x="787847" y="399452"/>
-                  </a:lnTo>
-                  <a:lnTo>
-                    <a:pt x="859470" y="431563"/>
-                  </a:lnTo>
-                  <a:lnTo>
-                    <a:pt x="931092" y="463033"/>
-                  </a:lnTo>
-                  <a:lnTo>
-                    <a:pt x="1002715" y="493876"/>
-                  </a:lnTo>
-                  <a:lnTo>
-                    <a:pt x="1074337" y="524102"/>
-                  </a:lnTo>
-                  <a:lnTo>
-                    <a:pt x="1145960" y="553726"/>
-                  </a:lnTo>
-                  <a:lnTo>
-                    <a:pt x="1217582" y="582758"/>
-                  </a:lnTo>
-                  <a:lnTo>
-                    <a:pt x="1289205" y="611211"/>
-                  </a:lnTo>
-                  <a:lnTo>
-                    <a:pt x="1360827" y="639096"/>
-                  </a:lnTo>
-                  <a:lnTo>
-                    <a:pt x="1432450" y="666424"/>
-                  </a:lnTo>
-                  <a:lnTo>
-                    <a:pt x="1504073" y="693207"/>
-                  </a:lnTo>
-                  <a:lnTo>
-                    <a:pt x="1575695" y="719455"/>
-                  </a:lnTo>
-                  <a:lnTo>
-                    <a:pt x="1647318" y="745180"/>
-                  </a:lnTo>
-                  <a:lnTo>
-                    <a:pt x="1718940" y="770391"/>
-                  </a:lnTo>
-                  <a:lnTo>
-                    <a:pt x="1790563" y="795099"/>
-                  </a:lnTo>
-                  <a:lnTo>
-                    <a:pt x="1862185" y="819314"/>
-                  </a:lnTo>
-                  <a:lnTo>
-                    <a:pt x="1933808" y="843045"/>
-                  </a:lnTo>
-                  <a:lnTo>
-                    <a:pt x="2005430" y="866303"/>
-                  </a:lnTo>
-                  <a:lnTo>
-                    <a:pt x="2077053" y="889097"/>
-                  </a:lnTo>
-                  <a:lnTo>
-                    <a:pt x="2148675" y="911435"/>
-                  </a:lnTo>
-                  <a:lnTo>
-                    <a:pt x="2220298" y="933328"/>
-                  </a:lnTo>
-                  <a:lnTo>
-                    <a:pt x="2291920" y="954784"/>
-                  </a:lnTo>
-                  <a:lnTo>
-                    <a:pt x="2363543" y="975812"/>
-                  </a:lnTo>
-                  <a:lnTo>
-                    <a:pt x="2435165" y="996420"/>
-                  </a:lnTo>
-                  <a:lnTo>
-                    <a:pt x="2506788" y="1016617"/>
-                  </a:lnTo>
-                  <a:lnTo>
-                    <a:pt x="2578410" y="1036411"/>
-                  </a:lnTo>
-                  <a:lnTo>
-                    <a:pt x="2650033" y="1055809"/>
-                  </a:lnTo>
-                  <a:lnTo>
-                    <a:pt x="2721655" y="1074821"/>
-                  </a:lnTo>
-                  <a:lnTo>
-                    <a:pt x="2793278" y="1093453"/>
-                  </a:lnTo>
-                  <a:lnTo>
-                    <a:pt x="2864901" y="1111713"/>
-                  </a:lnTo>
-                  <a:lnTo>
-                    <a:pt x="2936523" y="1129608"/>
-                  </a:lnTo>
-                  <a:lnTo>
-                    <a:pt x="3008146" y="1147147"/>
-                  </a:lnTo>
-                  <a:lnTo>
-                    <a:pt x="3079768" y="1164335"/>
-                  </a:lnTo>
-                  <a:lnTo>
-                    <a:pt x="3151391" y="1181181"/>
-                  </a:lnTo>
-                  <a:lnTo>
-                    <a:pt x="3223013" y="1197690"/>
-                  </a:lnTo>
-                  <a:lnTo>
-                    <a:pt x="3294636" y="1213870"/>
-                  </a:lnTo>
-                  <a:lnTo>
-                    <a:pt x="3366258" y="1229727"/>
-                  </a:lnTo>
-                  <a:lnTo>
-                    <a:pt x="3437881" y="1245267"/>
-                  </a:lnTo>
-                  <a:lnTo>
-                    <a:pt x="3509503" y="1260497"/>
-                  </a:lnTo>
-                  <a:lnTo>
-                    <a:pt x="3581126" y="1275423"/>
-                  </a:lnTo>
-                  <a:lnTo>
-                    <a:pt x="3652748" y="1290052"/>
-                  </a:lnTo>
-                  <a:lnTo>
-                    <a:pt x="3724371" y="1304388"/>
-                  </a:lnTo>
-                  <a:lnTo>
-                    <a:pt x="3795993" y="1318438"/>
-                  </a:lnTo>
-                  <a:lnTo>
-                    <a:pt x="3867616" y="1332208"/>
-                  </a:lnTo>
-                  <a:lnTo>
-                    <a:pt x="3939238" y="1345703"/>
-                  </a:lnTo>
-                  <a:lnTo>
-                    <a:pt x="4010861" y="1358929"/>
-                  </a:lnTo>
-                  <a:lnTo>
-                    <a:pt x="4082483" y="1371890"/>
-                  </a:lnTo>
-                  <a:lnTo>
-                    <a:pt x="4154106" y="1384593"/>
-                  </a:lnTo>
-                  <a:lnTo>
-                    <a:pt x="4225729" y="1397043"/>
-                  </a:lnTo>
-                  <a:lnTo>
-                    <a:pt x="4297351" y="1409244"/>
-                  </a:lnTo>
-                  <a:lnTo>
-                    <a:pt x="4368974" y="1421201"/>
-                  </a:lnTo>
-                  <a:lnTo>
-                    <a:pt x="4440596" y="1432920"/>
-                  </a:lnTo>
-                  <a:lnTo>
-                    <a:pt x="4512219" y="1444405"/>
-                  </a:lnTo>
-                  <a:lnTo>
-                    <a:pt x="4583841" y="1455661"/>
-                  </a:lnTo>
-                  <a:lnTo>
-                    <a:pt x="4655464" y="1466692"/>
-                  </a:lnTo>
-                  <a:lnTo>
-                    <a:pt x="4727086" y="1477503"/>
-                  </a:lnTo>
-                  <a:lnTo>
-                    <a:pt x="4798709" y="1488098"/>
-                  </a:lnTo>
-                  <a:lnTo>
-                    <a:pt x="4870331" y="1498481"/>
-                  </a:lnTo>
-                  <a:lnTo>
-                    <a:pt x="4941954" y="1508658"/>
-                  </a:lnTo>
-                  <a:lnTo>
-                    <a:pt x="5013576" y="1518631"/>
-                  </a:lnTo>
-                  <a:lnTo>
-                    <a:pt x="5085199" y="1528405"/>
-                  </a:lnTo>
-                  <a:lnTo>
-                    <a:pt x="5156821" y="1537985"/>
-                  </a:lnTo>
-                  <a:lnTo>
-                    <a:pt x="5228444" y="1547373"/>
-                  </a:lnTo>
-                  <a:lnTo>
-                    <a:pt x="5300066" y="1556573"/>
-                  </a:lnTo>
-                  <a:lnTo>
-                    <a:pt x="5371689" y="1565590"/>
-                  </a:lnTo>
-                  <a:lnTo>
-                    <a:pt x="5443311" y="1574427"/>
-                  </a:lnTo>
-                  <a:lnTo>
-                    <a:pt x="5514934" y="1583088"/>
-                  </a:lnTo>
-                  <a:lnTo>
-                    <a:pt x="5586557" y="1591576"/>
-                  </a:lnTo>
-                  <a:lnTo>
-                    <a:pt x="5658179" y="1599894"/>
-                  </a:lnTo>
-                  <a:lnTo>
-                    <a:pt x="5729802" y="1608047"/>
-                  </a:lnTo>
-                  <a:lnTo>
-                    <a:pt x="5801424" y="1616036"/>
-                  </a:lnTo>
-                  <a:lnTo>
-                    <a:pt x="5873047" y="1623866"/>
-                  </a:lnTo>
-                  <a:lnTo>
-                    <a:pt x="5944669" y="1631540"/>
-                  </a:lnTo>
-                  <a:lnTo>
-                    <a:pt x="6016292" y="1639061"/>
-                  </a:lnTo>
-                  <a:lnTo>
-                    <a:pt x="6087914" y="1646432"/>
-                  </a:lnTo>
-                  <a:lnTo>
-                    <a:pt x="6159537" y="1653655"/>
-                  </a:lnTo>
-                  <a:lnTo>
-                    <a:pt x="6231159" y="1660735"/>
-                  </a:lnTo>
-                  <a:lnTo>
-                    <a:pt x="6302782" y="1667673"/>
-                  </a:lnTo>
-                  <a:lnTo>
-                    <a:pt x="6374404" y="1674473"/>
-                  </a:lnTo>
-                  <a:lnTo>
-                    <a:pt x="6446027" y="1681137"/>
-                  </a:lnTo>
-                  <a:lnTo>
-                    <a:pt x="6517649" y="1687668"/>
-                  </a:lnTo>
-                  <a:lnTo>
-                    <a:pt x="6589272" y="1694068"/>
-                  </a:lnTo>
-                  <a:lnTo>
-                    <a:pt x="6660894" y="1700341"/>
-                  </a:lnTo>
-                  <a:lnTo>
-                    <a:pt x="6732517" y="1706489"/>
-                  </a:lnTo>
-                  <a:lnTo>
-                    <a:pt x="6804139" y="1712514"/>
-                  </a:lnTo>
-                  <a:lnTo>
-                    <a:pt x="6875762" y="1718418"/>
-                  </a:lnTo>
-                  <a:lnTo>
-                    <a:pt x="6947385" y="1724205"/>
-                  </a:lnTo>
-                  <a:lnTo>
-                    <a:pt x="7019007" y="1729876"/>
-                  </a:lnTo>
-                  <a:lnTo>
-                    <a:pt x="7090630" y="1735435"/>
+                    <a:pt x="71622" y="43144"/>
+                  </a:lnTo>
+                  <a:lnTo>
+                    <a:pt x="143245" y="85393"/>
+                  </a:lnTo>
+                  <a:lnTo>
+                    <a:pt x="214867" y="126766"/>
+                  </a:lnTo>
+                  <a:lnTo>
+                    <a:pt x="286490" y="167281"/>
+                  </a:lnTo>
+                  <a:lnTo>
+                    <a:pt x="358112" y="206955"/>
+                  </a:lnTo>
+                  <a:lnTo>
+                    <a:pt x="429735" y="245807"/>
+                  </a:lnTo>
+                  <a:lnTo>
+                    <a:pt x="501357" y="283852"/>
+                  </a:lnTo>
+                  <a:lnTo>
+                    <a:pt x="572980" y="321109"/>
+                  </a:lnTo>
+                  <a:lnTo>
+                    <a:pt x="644602" y="357593"/>
+                  </a:lnTo>
+                  <a:lnTo>
+                    <a:pt x="716225" y="393320"/>
+                  </a:lnTo>
+                  <a:lnTo>
+                    <a:pt x="787847" y="428307"/>
+                  </a:lnTo>
+                  <a:lnTo>
+                    <a:pt x="859470" y="462567"/>
+                  </a:lnTo>
+                  <a:lnTo>
+                    <a:pt x="931092" y="496117"/>
+                  </a:lnTo>
+                  <a:lnTo>
+                    <a:pt x="1002715" y="528971"/>
+                  </a:lnTo>
+                  <a:lnTo>
+                    <a:pt x="1074337" y="561144"/>
+                  </a:lnTo>
+                  <a:lnTo>
+                    <a:pt x="1145960" y="592649"/>
+                  </a:lnTo>
+                  <a:lnTo>
+                    <a:pt x="1217582" y="623501"/>
+                  </a:lnTo>
+                  <a:lnTo>
+                    <a:pt x="1289205" y="653713"/>
+                  </a:lnTo>
+                  <a:lnTo>
+                    <a:pt x="1360827" y="683299"/>
+                  </a:lnTo>
+                  <a:lnTo>
+                    <a:pt x="1432450" y="712271"/>
+                  </a:lnTo>
+                  <a:lnTo>
+                    <a:pt x="1504073" y="740641"/>
+                  </a:lnTo>
+                  <a:lnTo>
+                    <a:pt x="1575695" y="768424"/>
+                  </a:lnTo>
+                  <a:lnTo>
+                    <a:pt x="1647318" y="795630"/>
+                  </a:lnTo>
+                  <a:lnTo>
+                    <a:pt x="1718940" y="822272"/>
+                  </a:lnTo>
+                  <a:lnTo>
+                    <a:pt x="1790563" y="848361"/>
+                  </a:lnTo>
+                  <a:lnTo>
+                    <a:pt x="1862185" y="873910"/>
+                  </a:lnTo>
+                  <a:lnTo>
+                    <a:pt x="1933808" y="898928"/>
+                  </a:lnTo>
+                  <a:lnTo>
+                    <a:pt x="2005430" y="923427"/>
+                  </a:lnTo>
+                  <a:lnTo>
+                    <a:pt x="2077053" y="947419"/>
+                  </a:lnTo>
+                  <a:lnTo>
+                    <a:pt x="2148675" y="970912"/>
+                  </a:lnTo>
+                  <a:lnTo>
+                    <a:pt x="2220298" y="993919"/>
+                  </a:lnTo>
+                  <a:lnTo>
+                    <a:pt x="2291920" y="1016448"/>
+                  </a:lnTo>
+                  <a:lnTo>
+                    <a:pt x="2363543" y="1038510"/>
+                  </a:lnTo>
+                  <a:lnTo>
+                    <a:pt x="2435165" y="1060114"/>
+                  </a:lnTo>
+                  <a:lnTo>
+                    <a:pt x="2506788" y="1081271"/>
+                  </a:lnTo>
+                  <a:lnTo>
+                    <a:pt x="2578410" y="1101988"/>
+                  </a:lnTo>
+                  <a:lnTo>
+                    <a:pt x="2650033" y="1122276"/>
+                  </a:lnTo>
+                  <a:lnTo>
+                    <a:pt x="2721655" y="1142143"/>
+                  </a:lnTo>
+                  <a:lnTo>
+                    <a:pt x="2793278" y="1161598"/>
+                  </a:lnTo>
+                  <a:lnTo>
+                    <a:pt x="2864901" y="1180649"/>
+                  </a:lnTo>
+                  <a:lnTo>
+                    <a:pt x="2936523" y="1199306"/>
+                  </a:lnTo>
+                  <a:lnTo>
+                    <a:pt x="3008146" y="1217575"/>
+                  </a:lnTo>
+                  <a:lnTo>
+                    <a:pt x="3079768" y="1235465"/>
+                  </a:lnTo>
+                  <a:lnTo>
+                    <a:pt x="3151391" y="1252985"/>
+                  </a:lnTo>
+                  <a:lnTo>
+                    <a:pt x="3223013" y="1270141"/>
+                  </a:lnTo>
+                  <a:lnTo>
+                    <a:pt x="3294636" y="1286941"/>
+                  </a:lnTo>
+                  <a:lnTo>
+                    <a:pt x="3366258" y="1303392"/>
+                  </a:lnTo>
+                  <a:lnTo>
+                    <a:pt x="3437881" y="1319503"/>
+                  </a:lnTo>
+                  <a:lnTo>
+                    <a:pt x="3509503" y="1335279"/>
+                  </a:lnTo>
+                  <a:lnTo>
+                    <a:pt x="3581126" y="1350728"/>
+                  </a:lnTo>
+                  <a:lnTo>
+                    <a:pt x="3652748" y="1365857"/>
+                  </a:lnTo>
+                  <a:lnTo>
+                    <a:pt x="3724371" y="1380672"/>
+                  </a:lnTo>
+                  <a:lnTo>
+                    <a:pt x="3795993" y="1395180"/>
+                  </a:lnTo>
+                  <a:lnTo>
+                    <a:pt x="3867616" y="1409386"/>
+                  </a:lnTo>
+                  <a:lnTo>
+                    <a:pt x="3939238" y="1423298"/>
+                  </a:lnTo>
+                  <a:lnTo>
+                    <a:pt x="4010861" y="1436922"/>
+                  </a:lnTo>
+                  <a:lnTo>
+                    <a:pt x="4082483" y="1450263"/>
+                  </a:lnTo>
+                  <a:lnTo>
+                    <a:pt x="4154106" y="1463327"/>
+                  </a:lnTo>
+                  <a:lnTo>
+                    <a:pt x="4225729" y="1476120"/>
+                  </a:lnTo>
+                  <a:lnTo>
+                    <a:pt x="4297351" y="1488648"/>
+                  </a:lnTo>
+                  <a:lnTo>
+                    <a:pt x="4368974" y="1500916"/>
+                  </a:lnTo>
+                  <a:lnTo>
+                    <a:pt x="4440596" y="1512930"/>
+                  </a:lnTo>
+                  <a:lnTo>
+                    <a:pt x="4512219" y="1524694"/>
+                  </a:lnTo>
+                  <a:lnTo>
+                    <a:pt x="4583841" y="1536215"/>
+                  </a:lnTo>
+                  <a:lnTo>
+                    <a:pt x="4655464" y="1547496"/>
+                  </a:lnTo>
+                  <a:lnTo>
+                    <a:pt x="4727086" y="1558544"/>
+                  </a:lnTo>
+                  <a:lnTo>
+                    <a:pt x="4798709" y="1569362"/>
+                  </a:lnTo>
+                  <a:lnTo>
+                    <a:pt x="4870331" y="1579956"/>
+                  </a:lnTo>
+                  <a:lnTo>
+                    <a:pt x="4941954" y="1590331"/>
+                  </a:lnTo>
+                  <a:lnTo>
+                    <a:pt x="5013576" y="1600490"/>
+                  </a:lnTo>
+                  <a:lnTo>
+                    <a:pt x="5085199" y="1610438"/>
+                  </a:lnTo>
+                  <a:lnTo>
+                    <a:pt x="5156821" y="1620180"/>
+                  </a:lnTo>
+                  <a:lnTo>
+                    <a:pt x="5228444" y="1629720"/>
+                  </a:lnTo>
+                  <a:lnTo>
+                    <a:pt x="5300066" y="1639062"/>
+                  </a:lnTo>
+                  <a:lnTo>
+                    <a:pt x="5371689" y="1648211"/>
+                  </a:lnTo>
+                  <a:lnTo>
+                    <a:pt x="5443311" y="1657169"/>
+                  </a:lnTo>
+                  <a:lnTo>
+                    <a:pt x="5514934" y="1665942"/>
+                  </a:lnTo>
+                  <a:lnTo>
+                    <a:pt x="5586557" y="1674533"/>
+                  </a:lnTo>
+                  <a:lnTo>
+                    <a:pt x="5658179" y="1682945"/>
+                  </a:lnTo>
+                  <a:lnTo>
+                    <a:pt x="5729802" y="1691184"/>
+                  </a:lnTo>
+                  <a:lnTo>
+                    <a:pt x="5801424" y="1699251"/>
+                  </a:lnTo>
+                  <a:lnTo>
+                    <a:pt x="5873047" y="1707151"/>
+                  </a:lnTo>
+                  <a:lnTo>
+                    <a:pt x="5944669" y="1714887"/>
+                  </a:lnTo>
+                  <a:lnTo>
+                    <a:pt x="6016292" y="1722463"/>
+                  </a:lnTo>
+                  <a:lnTo>
+                    <a:pt x="6087914" y="1729881"/>
+                  </a:lnTo>
+                  <a:lnTo>
+                    <a:pt x="6159537" y="1737146"/>
+                  </a:lnTo>
+                  <a:lnTo>
+                    <a:pt x="6231159" y="1744260"/>
+                  </a:lnTo>
+                  <a:lnTo>
+                    <a:pt x="6302782" y="1751226"/>
+                  </a:lnTo>
+                  <a:lnTo>
+                    <a:pt x="6374404" y="1758048"/>
+                  </a:lnTo>
+                  <a:lnTo>
+                    <a:pt x="6446027" y="1764729"/>
+                  </a:lnTo>
+                  <a:lnTo>
+                    <a:pt x="6517649" y="1771271"/>
+                  </a:lnTo>
+                  <a:lnTo>
+                    <a:pt x="6589272" y="1777677"/>
+                  </a:lnTo>
+                  <a:lnTo>
+                    <a:pt x="6660894" y="1783950"/>
+                  </a:lnTo>
+                  <a:lnTo>
+                    <a:pt x="6732517" y="1790094"/>
+                  </a:lnTo>
+                  <a:lnTo>
+                    <a:pt x="6804139" y="1796109"/>
+                  </a:lnTo>
+                  <a:lnTo>
+                    <a:pt x="6875762" y="1802000"/>
+                  </a:lnTo>
+                  <a:lnTo>
+                    <a:pt x="6947385" y="1807769"/>
+                  </a:lnTo>
+                  <a:lnTo>
+                    <a:pt x="7019007" y="1813419"/>
+                  </a:lnTo>
+                  <a:lnTo>
+                    <a:pt x="7090630" y="1818951"/>
                   </a:lnTo>
                 </a:path>
               </a:pathLst>
@@ -5023,7 +5017,7 @@
           </p:nvSpPr>
           <p:spPr>
             <a:xfrm>
-              <a:off x="4313661" y="2073503"/>
+              <a:off x="4313914" y="2073503"/>
               <a:ext cx="0" cy="3649639"/>
             </a:xfrm>
             <a:custGeom>
@@ -5296,7 +5290,7 @@
           </p:nvSpPr>
           <p:spPr>
             <a:xfrm>
-              <a:off x="1343342" y="5785772"/>
+              <a:off x="1344940" y="5785772"/>
               <a:ext cx="161574" cy="80101"/>
             </a:xfrm>
             <a:prstGeom prst="rect">
@@ -5342,7 +5336,7 @@
           </p:nvSpPr>
           <p:spPr>
             <a:xfrm>
-              <a:off x="2280620" y="5785772"/>
+              <a:off x="2281218" y="5785772"/>
               <a:ext cx="161574" cy="80101"/>
             </a:xfrm>
             <a:prstGeom prst="rect">
@@ -5388,7 +5382,7 @@
           </p:nvSpPr>
           <p:spPr>
             <a:xfrm>
-              <a:off x="3217897" y="5785772"/>
+              <a:off x="3217496" y="5785772"/>
               <a:ext cx="161574" cy="80101"/>
             </a:xfrm>
             <a:prstGeom prst="rect">
@@ -5434,7 +5428,7 @@
           </p:nvSpPr>
           <p:spPr>
             <a:xfrm>
-              <a:off x="4204872" y="5785772"/>
+              <a:off x="4203472" y="5785772"/>
               <a:ext cx="62179" cy="80101"/>
             </a:xfrm>
             <a:prstGeom prst="rect">
@@ -5480,7 +5474,7 @@
           </p:nvSpPr>
           <p:spPr>
             <a:xfrm>
-              <a:off x="5111060" y="5785772"/>
+              <a:off x="5108660" y="5785772"/>
               <a:ext cx="124358" cy="80101"/>
             </a:xfrm>
             <a:prstGeom prst="rect">
@@ -5526,7 +5520,7 @@
           </p:nvSpPr>
           <p:spPr>
             <a:xfrm>
-              <a:off x="6048338" y="5785772"/>
+              <a:off x="6044938" y="5785772"/>
               <a:ext cx="124358" cy="80101"/>
             </a:xfrm>
             <a:prstGeom prst="rect">
@@ -5572,7 +5566,7 @@
           </p:nvSpPr>
           <p:spPr>
             <a:xfrm>
-              <a:off x="6985615" y="5785772"/>
+              <a:off x="6981216" y="5785772"/>
               <a:ext cx="124358" cy="80101"/>
             </a:xfrm>
             <a:prstGeom prst="rect">
@@ -5618,7 +5612,7 @@
           </p:nvSpPr>
           <p:spPr>
             <a:xfrm>
-              <a:off x="7922893" y="5785772"/>
+              <a:off x="7917494" y="5785772"/>
               <a:ext cx="124358" cy="80101"/>
             </a:xfrm>
             <a:prstGeom prst="rect">
@@ -5789,7 +5783,7 @@
                   <a:latin typeface="Helvetica"/>
                   <a:cs typeface="Helvetica"/>
                 </a:rPr>
-                <a:t>subHR per 10 % decline: 1.30 (1.05-1.61), p_Bonf = 0.094 (n = 6)  |  per IQR decline (Δ = 25.8 %): 1.98 (1.14-3.44)  |  IQR: [-10.7, 15.1] %</a:t>
+                <a:t>subHR per 10 % decline: 1.32 (1.06-1.63), p_Bonf = 0.071 (n = 6)  |  per IQR decline (Δ = 25.8 %): 2.03 (1.17-3.52)  |  IQR: [-10.6, 15.2] %</a:t>
               </a:r>
             </a:p>
           </p:txBody>
